--- a/Day_26/Microsoft-Power-BI-Storytelling.pptx
+++ b/Day_26/Microsoft-Power-BI-Storytelling.pptx
@@ -6,18 +6,19 @@
   </p:sldMasterIdLst>
   <p:sldIdLst>
     <p:sldId id="258" r:id="rId5"/>
-    <p:sldId id="259" r:id="rId6"/>
-    <p:sldId id="263" r:id="rId7"/>
-    <p:sldId id="256" r:id="rId8"/>
-    <p:sldId id="260" r:id="rId9"/>
-    <p:sldId id="257" r:id="rId10"/>
-    <p:sldId id="261" r:id="rId11"/>
-    <p:sldId id="262" r:id="rId12"/>
+    <p:sldId id="264" r:id="rId6"/>
+    <p:sldId id="259" r:id="rId7"/>
+    <p:sldId id="263" r:id="rId8"/>
+    <p:sldId id="256" r:id="rId9"/>
+    <p:sldId id="260" r:id="rId10"/>
+    <p:sldId id="257" r:id="rId11"/>
+    <p:sldId id="261" r:id="rId12"/>
+    <p:sldId id="262" r:id="rId13"/>
   </p:sldIdLst>
   <p:sldSz cx="12192000" cy="6858000"/>
   <p:notesSz cx="6858000" cy="9144000"/>
   <p:custDataLst>
-    <p:tags r:id="rId13"/>
+    <p:tags r:id="rId14"/>
   </p:custDataLst>
   <p:defaultTextStyle>
     <a:defPPr>
@@ -120,6 +121,3867 @@
     </p:ext>
   </p:extLst>
 </p:presentation>
+</file>
+
+<file path=ppt/diagrams/colors1.xml><?xml version="1.0" encoding="utf-8"?>
+<dgm:colorsDef xmlns:dgm="http://schemas.openxmlformats.org/drawingml/2006/diagram" xmlns:a="http://schemas.openxmlformats.org/drawingml/2006/main" uniqueId="urn:microsoft.com/office/officeart/2005/8/colors/accent1_2">
+  <dgm:title val=""/>
+  <dgm:desc val=""/>
+  <dgm:catLst>
+    <dgm:cat type="accent1" pri="11200"/>
+  </dgm:catLst>
+  <dgm:styleLbl name="node0">
+    <dgm:fillClrLst meth="repeat">
+      <a:schemeClr val="accent1"/>
+    </dgm:fillClrLst>
+    <dgm:linClrLst meth="repeat">
+      <a:schemeClr val="lt1"/>
+    </dgm:linClrLst>
+    <dgm:effectClrLst/>
+    <dgm:txLinClrLst/>
+    <dgm:txFillClrLst/>
+    <dgm:txEffectClrLst/>
+  </dgm:styleLbl>
+  <dgm:styleLbl name="alignNode1">
+    <dgm:fillClrLst meth="repeat">
+      <a:schemeClr val="accent1"/>
+    </dgm:fillClrLst>
+    <dgm:linClrLst meth="repeat">
+      <a:schemeClr val="accent1"/>
+    </dgm:linClrLst>
+    <dgm:effectClrLst/>
+    <dgm:txLinClrLst/>
+    <dgm:txFillClrLst/>
+    <dgm:txEffectClrLst/>
+  </dgm:styleLbl>
+  <dgm:styleLbl name="node1">
+    <dgm:fillClrLst meth="repeat">
+      <a:schemeClr val="accent1"/>
+    </dgm:fillClrLst>
+    <dgm:linClrLst meth="repeat">
+      <a:schemeClr val="lt1"/>
+    </dgm:linClrLst>
+    <dgm:effectClrLst/>
+    <dgm:txLinClrLst/>
+    <dgm:txFillClrLst/>
+    <dgm:txEffectClrLst/>
+  </dgm:styleLbl>
+  <dgm:styleLbl name="lnNode1">
+    <dgm:fillClrLst meth="repeat">
+      <a:schemeClr val="accent1"/>
+    </dgm:fillClrLst>
+    <dgm:linClrLst meth="repeat">
+      <a:schemeClr val="lt1"/>
+    </dgm:linClrLst>
+    <dgm:effectClrLst/>
+    <dgm:txLinClrLst/>
+    <dgm:txFillClrLst/>
+    <dgm:txEffectClrLst/>
+  </dgm:styleLbl>
+  <dgm:styleLbl name="vennNode1">
+    <dgm:fillClrLst meth="repeat">
+      <a:schemeClr val="accent1">
+        <a:alpha val="50000"/>
+      </a:schemeClr>
+    </dgm:fillClrLst>
+    <dgm:linClrLst meth="repeat">
+      <a:schemeClr val="lt1"/>
+    </dgm:linClrLst>
+    <dgm:effectClrLst/>
+    <dgm:txLinClrLst/>
+    <dgm:txFillClrLst/>
+    <dgm:txEffectClrLst/>
+  </dgm:styleLbl>
+  <dgm:styleLbl name="node2">
+    <dgm:fillClrLst meth="repeat">
+      <a:schemeClr val="accent1"/>
+    </dgm:fillClrLst>
+    <dgm:linClrLst meth="repeat">
+      <a:schemeClr val="lt1"/>
+    </dgm:linClrLst>
+    <dgm:effectClrLst/>
+    <dgm:txLinClrLst/>
+    <dgm:txFillClrLst/>
+    <dgm:txEffectClrLst/>
+  </dgm:styleLbl>
+  <dgm:styleLbl name="node3">
+    <dgm:fillClrLst meth="repeat">
+      <a:schemeClr val="accent1"/>
+    </dgm:fillClrLst>
+    <dgm:linClrLst meth="repeat">
+      <a:schemeClr val="lt1"/>
+    </dgm:linClrLst>
+    <dgm:effectClrLst/>
+    <dgm:txLinClrLst/>
+    <dgm:txFillClrLst/>
+    <dgm:txEffectClrLst/>
+  </dgm:styleLbl>
+  <dgm:styleLbl name="node4">
+    <dgm:fillClrLst meth="repeat">
+      <a:schemeClr val="accent1"/>
+    </dgm:fillClrLst>
+    <dgm:linClrLst meth="repeat">
+      <a:schemeClr val="lt1"/>
+    </dgm:linClrLst>
+    <dgm:effectClrLst/>
+    <dgm:txLinClrLst/>
+    <dgm:txFillClrLst/>
+    <dgm:txEffectClrLst/>
+  </dgm:styleLbl>
+  <dgm:styleLbl name="fgImgPlace1">
+    <dgm:fillClrLst meth="repeat">
+      <a:schemeClr val="accent1">
+        <a:tint val="50000"/>
+      </a:schemeClr>
+    </dgm:fillClrLst>
+    <dgm:linClrLst meth="repeat">
+      <a:schemeClr val="lt1"/>
+    </dgm:linClrLst>
+    <dgm:effectClrLst/>
+    <dgm:txLinClrLst/>
+    <dgm:txFillClrLst meth="repeat">
+      <a:schemeClr val="lt1"/>
+    </dgm:txFillClrLst>
+    <dgm:txEffectClrLst/>
+  </dgm:styleLbl>
+  <dgm:styleLbl name="alignImgPlace1">
+    <dgm:fillClrLst meth="repeat">
+      <a:schemeClr val="accent1">
+        <a:tint val="50000"/>
+      </a:schemeClr>
+    </dgm:fillClrLst>
+    <dgm:linClrLst meth="repeat">
+      <a:schemeClr val="lt1"/>
+    </dgm:linClrLst>
+    <dgm:effectClrLst/>
+    <dgm:txLinClrLst/>
+    <dgm:txFillClrLst meth="repeat">
+      <a:schemeClr val="lt1"/>
+    </dgm:txFillClrLst>
+    <dgm:txEffectClrLst/>
+  </dgm:styleLbl>
+  <dgm:styleLbl name="bgImgPlace1">
+    <dgm:fillClrLst meth="repeat">
+      <a:schemeClr val="accent1">
+        <a:tint val="50000"/>
+      </a:schemeClr>
+    </dgm:fillClrLst>
+    <dgm:linClrLst meth="repeat">
+      <a:schemeClr val="lt1"/>
+    </dgm:linClrLst>
+    <dgm:effectClrLst/>
+    <dgm:txLinClrLst/>
+    <dgm:txFillClrLst meth="repeat">
+      <a:schemeClr val="lt1"/>
+    </dgm:txFillClrLst>
+    <dgm:txEffectClrLst/>
+  </dgm:styleLbl>
+  <dgm:styleLbl name="sibTrans2D1">
+    <dgm:fillClrLst meth="repeat">
+      <a:schemeClr val="accent1">
+        <a:tint val="60000"/>
+      </a:schemeClr>
+    </dgm:fillClrLst>
+    <dgm:linClrLst meth="repeat">
+      <a:schemeClr val="accent1">
+        <a:tint val="60000"/>
+      </a:schemeClr>
+    </dgm:linClrLst>
+    <dgm:effectClrLst/>
+    <dgm:txLinClrLst/>
+    <dgm:txFillClrLst/>
+    <dgm:txEffectClrLst/>
+  </dgm:styleLbl>
+  <dgm:styleLbl name="fgSibTrans2D1">
+    <dgm:fillClrLst meth="repeat">
+      <a:schemeClr val="accent1">
+        <a:tint val="60000"/>
+      </a:schemeClr>
+    </dgm:fillClrLst>
+    <dgm:linClrLst meth="repeat">
+      <a:schemeClr val="accent1">
+        <a:tint val="60000"/>
+      </a:schemeClr>
+    </dgm:linClrLst>
+    <dgm:effectClrLst/>
+    <dgm:txLinClrLst/>
+    <dgm:txFillClrLst/>
+    <dgm:txEffectClrLst/>
+  </dgm:styleLbl>
+  <dgm:styleLbl name="bgSibTrans2D1">
+    <dgm:fillClrLst meth="repeat">
+      <a:schemeClr val="accent1">
+        <a:tint val="60000"/>
+      </a:schemeClr>
+    </dgm:fillClrLst>
+    <dgm:linClrLst meth="repeat">
+      <a:schemeClr val="accent1">
+        <a:tint val="60000"/>
+      </a:schemeClr>
+    </dgm:linClrLst>
+    <dgm:effectClrLst/>
+    <dgm:txLinClrLst/>
+    <dgm:txFillClrLst/>
+    <dgm:txEffectClrLst/>
+  </dgm:styleLbl>
+  <dgm:styleLbl name="sibTrans1D1">
+    <dgm:fillClrLst meth="repeat">
+      <a:schemeClr val="accent1"/>
+    </dgm:fillClrLst>
+    <dgm:linClrLst meth="repeat">
+      <a:schemeClr val="accent1"/>
+    </dgm:linClrLst>
+    <dgm:effectClrLst/>
+    <dgm:txLinClrLst/>
+    <dgm:txFillClrLst meth="repeat">
+      <a:schemeClr val="tx1"/>
+    </dgm:txFillClrLst>
+    <dgm:txEffectClrLst/>
+  </dgm:styleLbl>
+  <dgm:styleLbl name="callout">
+    <dgm:fillClrLst meth="repeat">
+      <a:schemeClr val="accent1"/>
+    </dgm:fillClrLst>
+    <dgm:linClrLst meth="repeat">
+      <a:schemeClr val="accent1">
+        <a:tint val="50000"/>
+      </a:schemeClr>
+    </dgm:linClrLst>
+    <dgm:effectClrLst/>
+    <dgm:txLinClrLst/>
+    <dgm:txFillClrLst meth="repeat">
+      <a:schemeClr val="tx1"/>
+    </dgm:txFillClrLst>
+    <dgm:txEffectClrLst/>
+  </dgm:styleLbl>
+  <dgm:styleLbl name="asst0">
+    <dgm:fillClrLst meth="repeat">
+      <a:schemeClr val="accent1"/>
+    </dgm:fillClrLst>
+    <dgm:linClrLst meth="repeat">
+      <a:schemeClr val="lt1"/>
+    </dgm:linClrLst>
+    <dgm:effectClrLst/>
+    <dgm:txLinClrLst/>
+    <dgm:txFillClrLst/>
+    <dgm:txEffectClrLst/>
+  </dgm:styleLbl>
+  <dgm:styleLbl name="asst1">
+    <dgm:fillClrLst meth="repeat">
+      <a:schemeClr val="accent1"/>
+    </dgm:fillClrLst>
+    <dgm:linClrLst meth="repeat">
+      <a:schemeClr val="lt1"/>
+    </dgm:linClrLst>
+    <dgm:effectClrLst/>
+    <dgm:txLinClrLst/>
+    <dgm:txFillClrLst/>
+    <dgm:txEffectClrLst/>
+  </dgm:styleLbl>
+  <dgm:styleLbl name="asst2">
+    <dgm:fillClrLst meth="repeat">
+      <a:schemeClr val="accent1"/>
+    </dgm:fillClrLst>
+    <dgm:linClrLst meth="repeat">
+      <a:schemeClr val="lt1"/>
+    </dgm:linClrLst>
+    <dgm:effectClrLst/>
+    <dgm:txLinClrLst/>
+    <dgm:txFillClrLst/>
+    <dgm:txEffectClrLst/>
+  </dgm:styleLbl>
+  <dgm:styleLbl name="asst3">
+    <dgm:fillClrLst meth="repeat">
+      <a:schemeClr val="accent1"/>
+    </dgm:fillClrLst>
+    <dgm:linClrLst meth="repeat">
+      <a:schemeClr val="lt1"/>
+    </dgm:linClrLst>
+    <dgm:effectClrLst/>
+    <dgm:txLinClrLst/>
+    <dgm:txFillClrLst/>
+    <dgm:txEffectClrLst/>
+  </dgm:styleLbl>
+  <dgm:styleLbl name="asst4">
+    <dgm:fillClrLst meth="repeat">
+      <a:schemeClr val="accent1"/>
+    </dgm:fillClrLst>
+    <dgm:linClrLst meth="repeat">
+      <a:schemeClr val="lt1"/>
+    </dgm:linClrLst>
+    <dgm:effectClrLst/>
+    <dgm:txLinClrLst/>
+    <dgm:txFillClrLst/>
+    <dgm:txEffectClrLst/>
+  </dgm:styleLbl>
+  <dgm:styleLbl name="parChTrans2D1">
+    <dgm:fillClrLst meth="repeat">
+      <a:schemeClr val="accent1">
+        <a:tint val="60000"/>
+      </a:schemeClr>
+    </dgm:fillClrLst>
+    <dgm:linClrLst meth="repeat">
+      <a:schemeClr val="accent1">
+        <a:tint val="60000"/>
+      </a:schemeClr>
+    </dgm:linClrLst>
+    <dgm:effectClrLst/>
+    <dgm:txLinClrLst/>
+    <dgm:txFillClrLst meth="repeat">
+      <a:schemeClr val="lt1"/>
+    </dgm:txFillClrLst>
+    <dgm:txEffectClrLst/>
+  </dgm:styleLbl>
+  <dgm:styleLbl name="parChTrans2D2">
+    <dgm:fillClrLst meth="repeat">
+      <a:schemeClr val="accent1"/>
+    </dgm:fillClrLst>
+    <dgm:linClrLst meth="repeat">
+      <a:schemeClr val="accent1"/>
+    </dgm:linClrLst>
+    <dgm:effectClrLst/>
+    <dgm:txLinClrLst/>
+    <dgm:txFillClrLst meth="repeat">
+      <a:schemeClr val="lt1"/>
+    </dgm:txFillClrLst>
+    <dgm:txEffectClrLst/>
+  </dgm:styleLbl>
+  <dgm:styleLbl name="parChTrans2D3">
+    <dgm:fillClrLst meth="repeat">
+      <a:schemeClr val="accent1"/>
+    </dgm:fillClrLst>
+    <dgm:linClrLst meth="repeat">
+      <a:schemeClr val="accent1"/>
+    </dgm:linClrLst>
+    <dgm:effectClrLst/>
+    <dgm:txLinClrLst/>
+    <dgm:txFillClrLst meth="repeat">
+      <a:schemeClr val="lt1"/>
+    </dgm:txFillClrLst>
+    <dgm:txEffectClrLst/>
+  </dgm:styleLbl>
+  <dgm:styleLbl name="parChTrans2D4">
+    <dgm:fillClrLst meth="repeat">
+      <a:schemeClr val="accent1"/>
+    </dgm:fillClrLst>
+    <dgm:linClrLst meth="repeat">
+      <a:schemeClr val="accent1"/>
+    </dgm:linClrLst>
+    <dgm:effectClrLst/>
+    <dgm:txLinClrLst/>
+    <dgm:txFillClrLst meth="repeat">
+      <a:schemeClr val="lt1"/>
+    </dgm:txFillClrLst>
+    <dgm:txEffectClrLst/>
+  </dgm:styleLbl>
+  <dgm:styleLbl name="parChTrans1D1">
+    <dgm:fillClrLst meth="repeat">
+      <a:schemeClr val="accent1"/>
+    </dgm:fillClrLst>
+    <dgm:linClrLst meth="repeat">
+      <a:schemeClr val="accent1">
+        <a:shade val="60000"/>
+      </a:schemeClr>
+    </dgm:linClrLst>
+    <dgm:effectClrLst/>
+    <dgm:txLinClrLst/>
+    <dgm:txFillClrLst meth="repeat">
+      <a:schemeClr val="tx1"/>
+    </dgm:txFillClrLst>
+    <dgm:txEffectClrLst/>
+  </dgm:styleLbl>
+  <dgm:styleLbl name="parChTrans1D2">
+    <dgm:fillClrLst meth="repeat">
+      <a:schemeClr val="accent1"/>
+    </dgm:fillClrLst>
+    <dgm:linClrLst meth="repeat">
+      <a:schemeClr val="accent1">
+        <a:shade val="60000"/>
+      </a:schemeClr>
+    </dgm:linClrLst>
+    <dgm:effectClrLst/>
+    <dgm:txLinClrLst/>
+    <dgm:txFillClrLst meth="repeat">
+      <a:schemeClr val="tx1"/>
+    </dgm:txFillClrLst>
+    <dgm:txEffectClrLst/>
+  </dgm:styleLbl>
+  <dgm:styleLbl name="parChTrans1D3">
+    <dgm:fillClrLst meth="repeat">
+      <a:schemeClr val="accent1"/>
+    </dgm:fillClrLst>
+    <dgm:linClrLst meth="repeat">
+      <a:schemeClr val="accent1">
+        <a:shade val="80000"/>
+      </a:schemeClr>
+    </dgm:linClrLst>
+    <dgm:effectClrLst/>
+    <dgm:txLinClrLst/>
+    <dgm:txFillClrLst meth="repeat">
+      <a:schemeClr val="tx1"/>
+    </dgm:txFillClrLst>
+    <dgm:txEffectClrLst/>
+  </dgm:styleLbl>
+  <dgm:styleLbl name="parChTrans1D4">
+    <dgm:fillClrLst meth="repeat">
+      <a:schemeClr val="accent1"/>
+    </dgm:fillClrLst>
+    <dgm:linClrLst meth="repeat">
+      <a:schemeClr val="accent1">
+        <a:shade val="80000"/>
+      </a:schemeClr>
+    </dgm:linClrLst>
+    <dgm:effectClrLst/>
+    <dgm:txLinClrLst/>
+    <dgm:txFillClrLst meth="repeat">
+      <a:schemeClr val="tx1"/>
+    </dgm:txFillClrLst>
+    <dgm:txEffectClrLst/>
+  </dgm:styleLbl>
+  <dgm:styleLbl name="fgAcc1">
+    <dgm:fillClrLst meth="repeat">
+      <a:schemeClr val="lt1">
+        <a:alpha val="90000"/>
+      </a:schemeClr>
+    </dgm:fillClrLst>
+    <dgm:linClrLst meth="repeat">
+      <a:schemeClr val="accent1"/>
+    </dgm:linClrLst>
+    <dgm:effectClrLst/>
+    <dgm:txLinClrLst/>
+    <dgm:txFillClrLst meth="repeat">
+      <a:schemeClr val="dk1"/>
+    </dgm:txFillClrLst>
+    <dgm:txEffectClrLst/>
+  </dgm:styleLbl>
+  <dgm:styleLbl name="conFgAcc1">
+    <dgm:fillClrLst meth="repeat">
+      <a:schemeClr val="lt1">
+        <a:alpha val="90000"/>
+      </a:schemeClr>
+    </dgm:fillClrLst>
+    <dgm:linClrLst meth="repeat">
+      <a:schemeClr val="accent1"/>
+    </dgm:linClrLst>
+    <dgm:effectClrLst/>
+    <dgm:txLinClrLst/>
+    <dgm:txFillClrLst meth="repeat">
+      <a:schemeClr val="dk1"/>
+    </dgm:txFillClrLst>
+    <dgm:txEffectClrLst/>
+  </dgm:styleLbl>
+  <dgm:styleLbl name="alignAcc1">
+    <dgm:fillClrLst meth="repeat">
+      <a:schemeClr val="lt1">
+        <a:alpha val="90000"/>
+      </a:schemeClr>
+    </dgm:fillClrLst>
+    <dgm:linClrLst meth="repeat">
+      <a:schemeClr val="accent1"/>
+    </dgm:linClrLst>
+    <dgm:effectClrLst/>
+    <dgm:txLinClrLst/>
+    <dgm:txFillClrLst meth="repeat">
+      <a:schemeClr val="dk1"/>
+    </dgm:txFillClrLst>
+    <dgm:txEffectClrLst/>
+  </dgm:styleLbl>
+  <dgm:styleLbl name="trAlignAcc1">
+    <dgm:fillClrLst meth="repeat">
+      <a:schemeClr val="lt1">
+        <a:alpha val="40000"/>
+      </a:schemeClr>
+    </dgm:fillClrLst>
+    <dgm:linClrLst meth="repeat">
+      <a:schemeClr val="accent1"/>
+    </dgm:linClrLst>
+    <dgm:effectClrLst/>
+    <dgm:txLinClrLst/>
+    <dgm:txFillClrLst meth="repeat">
+      <a:schemeClr val="dk1"/>
+    </dgm:txFillClrLst>
+    <dgm:txEffectClrLst/>
+  </dgm:styleLbl>
+  <dgm:styleLbl name="bgAcc1">
+    <dgm:fillClrLst meth="repeat">
+      <a:schemeClr val="lt1">
+        <a:alpha val="90000"/>
+      </a:schemeClr>
+    </dgm:fillClrLst>
+    <dgm:linClrLst meth="repeat">
+      <a:schemeClr val="accent1"/>
+    </dgm:linClrLst>
+    <dgm:effectClrLst/>
+    <dgm:txLinClrLst/>
+    <dgm:txFillClrLst meth="repeat">
+      <a:schemeClr val="dk1"/>
+    </dgm:txFillClrLst>
+    <dgm:txEffectClrLst/>
+  </dgm:styleLbl>
+  <dgm:styleLbl name="solidFgAcc1">
+    <dgm:fillClrLst meth="repeat">
+      <a:schemeClr val="lt1"/>
+    </dgm:fillClrLst>
+    <dgm:linClrLst meth="repeat">
+      <a:schemeClr val="accent1"/>
+    </dgm:linClrLst>
+    <dgm:effectClrLst/>
+    <dgm:txLinClrLst/>
+    <dgm:txFillClrLst meth="repeat">
+      <a:schemeClr val="dk1"/>
+    </dgm:txFillClrLst>
+    <dgm:txEffectClrLst/>
+  </dgm:styleLbl>
+  <dgm:styleLbl name="solidAlignAcc1">
+    <dgm:fillClrLst meth="repeat">
+      <a:schemeClr val="lt1"/>
+    </dgm:fillClrLst>
+    <dgm:linClrLst meth="repeat">
+      <a:schemeClr val="accent1"/>
+    </dgm:linClrLst>
+    <dgm:effectClrLst/>
+    <dgm:txLinClrLst/>
+    <dgm:txFillClrLst meth="repeat">
+      <a:schemeClr val="dk1"/>
+    </dgm:txFillClrLst>
+    <dgm:txEffectClrLst/>
+  </dgm:styleLbl>
+  <dgm:styleLbl name="solidBgAcc1">
+    <dgm:fillClrLst meth="repeat">
+      <a:schemeClr val="lt1"/>
+    </dgm:fillClrLst>
+    <dgm:linClrLst meth="repeat">
+      <a:schemeClr val="accent1"/>
+    </dgm:linClrLst>
+    <dgm:effectClrLst/>
+    <dgm:txLinClrLst/>
+    <dgm:txFillClrLst meth="repeat">
+      <a:schemeClr val="dk1"/>
+    </dgm:txFillClrLst>
+    <dgm:txEffectClrLst/>
+  </dgm:styleLbl>
+  <dgm:styleLbl name="fgAccFollowNode1">
+    <dgm:fillClrLst meth="repeat">
+      <a:schemeClr val="accent1">
+        <a:alpha val="90000"/>
+        <a:tint val="40000"/>
+      </a:schemeClr>
+    </dgm:fillClrLst>
+    <dgm:linClrLst meth="repeat">
+      <a:schemeClr val="accent1">
+        <a:alpha val="90000"/>
+        <a:tint val="40000"/>
+      </a:schemeClr>
+    </dgm:linClrLst>
+    <dgm:effectClrLst/>
+    <dgm:txLinClrLst/>
+    <dgm:txFillClrLst meth="repeat">
+      <a:schemeClr val="dk1"/>
+    </dgm:txFillClrLst>
+    <dgm:txEffectClrLst/>
+  </dgm:styleLbl>
+  <dgm:styleLbl name="alignAccFollowNode1">
+    <dgm:fillClrLst meth="repeat">
+      <a:schemeClr val="accent1">
+        <a:alpha val="90000"/>
+        <a:tint val="40000"/>
+      </a:schemeClr>
+    </dgm:fillClrLst>
+    <dgm:linClrLst meth="repeat">
+      <a:schemeClr val="accent1">
+        <a:alpha val="90000"/>
+        <a:tint val="40000"/>
+      </a:schemeClr>
+    </dgm:linClrLst>
+    <dgm:effectClrLst/>
+    <dgm:txLinClrLst/>
+    <dgm:txFillClrLst meth="repeat">
+      <a:schemeClr val="dk1"/>
+    </dgm:txFillClrLst>
+    <dgm:txEffectClrLst/>
+  </dgm:styleLbl>
+  <dgm:styleLbl name="bgAccFollowNode1">
+    <dgm:fillClrLst meth="repeat">
+      <a:schemeClr val="accent1">
+        <a:alpha val="90000"/>
+        <a:tint val="40000"/>
+      </a:schemeClr>
+    </dgm:fillClrLst>
+    <dgm:linClrLst meth="repeat">
+      <a:schemeClr val="accent1">
+        <a:alpha val="90000"/>
+        <a:tint val="40000"/>
+      </a:schemeClr>
+    </dgm:linClrLst>
+    <dgm:effectClrLst/>
+    <dgm:txLinClrLst/>
+    <dgm:txFillClrLst meth="repeat">
+      <a:schemeClr val="dk1"/>
+    </dgm:txFillClrLst>
+    <dgm:txEffectClrLst/>
+  </dgm:styleLbl>
+  <dgm:styleLbl name="fgAcc0">
+    <dgm:fillClrLst meth="repeat">
+      <a:schemeClr val="lt1">
+        <a:alpha val="90000"/>
+      </a:schemeClr>
+    </dgm:fillClrLst>
+    <dgm:linClrLst meth="repeat">
+      <a:schemeClr val="accent1"/>
+    </dgm:linClrLst>
+    <dgm:effectClrLst/>
+    <dgm:txLinClrLst/>
+    <dgm:txFillClrLst meth="repeat">
+      <a:schemeClr val="dk1"/>
+    </dgm:txFillClrLst>
+    <dgm:txEffectClrLst/>
+  </dgm:styleLbl>
+  <dgm:styleLbl name="fgAcc2">
+    <dgm:fillClrLst meth="repeat">
+      <a:schemeClr val="lt1">
+        <a:alpha val="90000"/>
+      </a:schemeClr>
+    </dgm:fillClrLst>
+    <dgm:linClrLst meth="repeat">
+      <a:schemeClr val="accent1"/>
+    </dgm:linClrLst>
+    <dgm:effectClrLst/>
+    <dgm:txLinClrLst/>
+    <dgm:txFillClrLst meth="repeat">
+      <a:schemeClr val="dk1"/>
+    </dgm:txFillClrLst>
+    <dgm:txEffectClrLst/>
+  </dgm:styleLbl>
+  <dgm:styleLbl name="fgAcc3">
+    <dgm:fillClrLst meth="repeat">
+      <a:schemeClr val="lt1">
+        <a:alpha val="90000"/>
+      </a:schemeClr>
+    </dgm:fillClrLst>
+    <dgm:linClrLst meth="repeat">
+      <a:schemeClr val="accent1"/>
+    </dgm:linClrLst>
+    <dgm:effectClrLst/>
+    <dgm:txLinClrLst/>
+    <dgm:txFillClrLst meth="repeat">
+      <a:schemeClr val="dk1"/>
+    </dgm:txFillClrLst>
+    <dgm:txEffectClrLst/>
+  </dgm:styleLbl>
+  <dgm:styleLbl name="fgAcc4">
+    <dgm:fillClrLst meth="repeat">
+      <a:schemeClr val="lt1">
+        <a:alpha val="90000"/>
+      </a:schemeClr>
+    </dgm:fillClrLst>
+    <dgm:linClrLst meth="repeat">
+      <a:schemeClr val="accent1"/>
+    </dgm:linClrLst>
+    <dgm:effectClrLst/>
+    <dgm:txLinClrLst/>
+    <dgm:txFillClrLst meth="repeat">
+      <a:schemeClr val="dk1"/>
+    </dgm:txFillClrLst>
+    <dgm:txEffectClrLst/>
+  </dgm:styleLbl>
+  <dgm:styleLbl name="bgShp">
+    <dgm:fillClrLst meth="repeat">
+      <a:schemeClr val="accent1">
+        <a:tint val="40000"/>
+      </a:schemeClr>
+    </dgm:fillClrLst>
+    <dgm:linClrLst meth="repeat">
+      <a:schemeClr val="accent1"/>
+    </dgm:linClrLst>
+    <dgm:effectClrLst/>
+    <dgm:txLinClrLst/>
+    <dgm:txFillClrLst meth="repeat">
+      <a:schemeClr val="dk1"/>
+    </dgm:txFillClrLst>
+    <dgm:txEffectClrLst/>
+  </dgm:styleLbl>
+  <dgm:styleLbl name="dkBgShp">
+    <dgm:fillClrLst meth="repeat">
+      <a:schemeClr val="accent1">
+        <a:shade val="80000"/>
+      </a:schemeClr>
+    </dgm:fillClrLst>
+    <dgm:linClrLst meth="repeat">
+      <a:schemeClr val="accent1"/>
+    </dgm:linClrLst>
+    <dgm:effectClrLst/>
+    <dgm:txLinClrLst/>
+    <dgm:txFillClrLst meth="repeat">
+      <a:schemeClr val="lt1"/>
+    </dgm:txFillClrLst>
+    <dgm:txEffectClrLst/>
+  </dgm:styleLbl>
+  <dgm:styleLbl name="trBgShp">
+    <dgm:fillClrLst meth="repeat">
+      <a:schemeClr val="accent1">
+        <a:tint val="50000"/>
+        <a:alpha val="40000"/>
+      </a:schemeClr>
+    </dgm:fillClrLst>
+    <dgm:linClrLst meth="repeat">
+      <a:schemeClr val="accent1"/>
+    </dgm:linClrLst>
+    <dgm:effectClrLst/>
+    <dgm:txLinClrLst/>
+    <dgm:txFillClrLst meth="repeat">
+      <a:schemeClr val="lt1"/>
+    </dgm:txFillClrLst>
+    <dgm:txEffectClrLst/>
+  </dgm:styleLbl>
+  <dgm:styleLbl name="fgShp">
+    <dgm:fillClrLst meth="repeat">
+      <a:schemeClr val="accent1">
+        <a:tint val="60000"/>
+      </a:schemeClr>
+    </dgm:fillClrLst>
+    <dgm:linClrLst meth="repeat">
+      <a:schemeClr val="lt1"/>
+    </dgm:linClrLst>
+    <dgm:effectClrLst/>
+    <dgm:txLinClrLst/>
+    <dgm:txFillClrLst meth="repeat">
+      <a:schemeClr val="dk1"/>
+    </dgm:txFillClrLst>
+    <dgm:txEffectClrLst/>
+  </dgm:styleLbl>
+  <dgm:styleLbl name="revTx">
+    <dgm:fillClrLst meth="repeat">
+      <a:schemeClr val="lt1">
+        <a:alpha val="0"/>
+      </a:schemeClr>
+    </dgm:fillClrLst>
+    <dgm:linClrLst meth="repeat">
+      <a:schemeClr val="dk1">
+        <a:alpha val="0"/>
+      </a:schemeClr>
+    </dgm:linClrLst>
+    <dgm:effectClrLst/>
+    <dgm:txLinClrLst/>
+    <dgm:txFillClrLst meth="repeat">
+      <a:schemeClr val="tx1"/>
+    </dgm:txFillClrLst>
+    <dgm:txEffectClrLst/>
+  </dgm:styleLbl>
+</dgm:colorsDef>
+</file>
+
+<file path=ppt/diagrams/data1.xml><?xml version="1.0" encoding="utf-8"?>
+<dgm:dataModel xmlns:dgm="http://schemas.openxmlformats.org/drawingml/2006/diagram" xmlns:a="http://schemas.openxmlformats.org/drawingml/2006/main">
+  <dgm:ptLst>
+    <dgm:pt modelId="{E473DDF5-6CC4-4555-97CE-4AA4A41E792D}" type="doc">
+      <dgm:prSet loTypeId="urn:microsoft.com/office/officeart/2005/8/layout/hList7" loCatId="list" qsTypeId="urn:microsoft.com/office/officeart/2005/8/quickstyle/simple1" qsCatId="simple" csTypeId="urn:microsoft.com/office/officeart/2005/8/colors/accent1_2" csCatId="accent1" phldr="1"/>
+      <dgm:spPr/>
+      <dgm:t>
+        <a:bodyPr/>
+        <a:lstStyle/>
+        <a:p>
+          <a:endParaRPr lang="en-IN"/>
+        </a:p>
+      </dgm:t>
+    </dgm:pt>
+    <dgm:pt modelId="{5C935B75-5472-4070-AED7-5373AB9BE463}">
+      <dgm:prSet phldrT="[Text]" phldr="0" custT="1"/>
+      <dgm:spPr/>
+      <dgm:t>
+        <a:bodyPr/>
+        <a:lstStyle/>
+        <a:p>
+          <a:r>
+            <a:rPr lang="en-IN" sz="1200">
+              <a:latin typeface="Arial" panose="020B0604020202020204" pitchFamily="34" charset="0"/>
+              <a:cs typeface="Arial" panose="020B0604020202020204" pitchFamily="34" charset="0"/>
+            </a:rPr>
+            <a:t>Data Processing</a:t>
+          </a:r>
+          <a:endParaRPr lang="en-IN" sz="1200" dirty="0">
+            <a:latin typeface="Arial" panose="020B0604020202020204" pitchFamily="34" charset="0"/>
+            <a:cs typeface="Arial" panose="020B0604020202020204" pitchFamily="34" charset="0"/>
+          </a:endParaRPr>
+        </a:p>
+      </dgm:t>
+    </dgm:pt>
+    <dgm:pt modelId="{B49CE075-6BB6-4E20-AD7B-5F7DE92C2197}" type="parTrans" cxnId="{83845461-5A15-45F5-9A2C-85DFE3625FA1}">
+      <dgm:prSet/>
+      <dgm:spPr/>
+      <dgm:t>
+        <a:bodyPr/>
+        <a:lstStyle/>
+        <a:p>
+          <a:endParaRPr lang="en-IN"/>
+        </a:p>
+      </dgm:t>
+    </dgm:pt>
+    <dgm:pt modelId="{6C5DBB6F-4539-4B11-866F-D4EECA7501E5}" type="sibTrans" cxnId="{83845461-5A15-45F5-9A2C-85DFE3625FA1}">
+      <dgm:prSet/>
+      <dgm:spPr/>
+      <dgm:t>
+        <a:bodyPr/>
+        <a:lstStyle/>
+        <a:p>
+          <a:endParaRPr lang="en-IN"/>
+        </a:p>
+      </dgm:t>
+    </dgm:pt>
+    <dgm:pt modelId="{0F697C53-6269-408E-A422-289A5106F59E}">
+      <dgm:prSet phldrT="[Text]" phldr="0" custT="1"/>
+      <dgm:spPr/>
+      <dgm:t>
+        <a:bodyPr/>
+        <a:lstStyle/>
+        <a:p>
+          <a:r>
+            <a:rPr lang="en-IN" sz="1200" dirty="0">
+              <a:latin typeface="Arial" panose="020B0604020202020204" pitchFamily="34" charset="0"/>
+              <a:cs typeface="Arial" panose="020B0604020202020204" pitchFamily="34" charset="0"/>
+            </a:rPr>
+            <a:t>LSTM Model Architecture and </a:t>
+          </a:r>
+          <a:r>
+            <a:rPr lang="en-IN" sz="1200">
+              <a:latin typeface="Arial" panose="020B0604020202020204" pitchFamily="34" charset="0"/>
+              <a:cs typeface="Arial" panose="020B0604020202020204" pitchFamily="34" charset="0"/>
+            </a:rPr>
+            <a:t>Model Training</a:t>
+          </a:r>
+          <a:endParaRPr lang="en-IN" sz="1200" dirty="0">
+            <a:latin typeface="Arial" panose="020B0604020202020204" pitchFamily="34" charset="0"/>
+            <a:cs typeface="Arial" panose="020B0604020202020204" pitchFamily="34" charset="0"/>
+          </a:endParaRPr>
+        </a:p>
+      </dgm:t>
+    </dgm:pt>
+    <dgm:pt modelId="{09AAD0A7-61FE-4526-8CAA-30FCE8C0F1A1}" type="parTrans" cxnId="{DA67B464-20B1-4E3E-A12C-DF0A9C9B9E0D}">
+      <dgm:prSet/>
+      <dgm:spPr/>
+      <dgm:t>
+        <a:bodyPr/>
+        <a:lstStyle/>
+        <a:p>
+          <a:endParaRPr lang="en-IN"/>
+        </a:p>
+      </dgm:t>
+    </dgm:pt>
+    <dgm:pt modelId="{CF18BEC3-408C-4226-B585-DE465D7D769E}" type="sibTrans" cxnId="{DA67B464-20B1-4E3E-A12C-DF0A9C9B9E0D}">
+      <dgm:prSet/>
+      <dgm:spPr/>
+      <dgm:t>
+        <a:bodyPr/>
+        <a:lstStyle/>
+        <a:p>
+          <a:endParaRPr lang="en-IN"/>
+        </a:p>
+      </dgm:t>
+    </dgm:pt>
+    <dgm:pt modelId="{FF906C97-A028-4D8F-A7CD-381DF6F98A33}">
+      <dgm:prSet phldrT="[Text]" phldr="0" custT="1"/>
+      <dgm:spPr/>
+      <dgm:t>
+        <a:bodyPr/>
+        <a:lstStyle/>
+        <a:p>
+          <a:r>
+            <a:rPr lang="en-IN" sz="1200" dirty="0">
+              <a:latin typeface="Arial" panose="020B0604020202020204" pitchFamily="34" charset="0"/>
+              <a:cs typeface="Arial" panose="020B0604020202020204" pitchFamily="34" charset="0"/>
+            </a:rPr>
+            <a:t>Prediction and Inverse Scaling and </a:t>
+          </a:r>
+          <a:r>
+            <a:rPr lang="en-IN" sz="1200">
+              <a:latin typeface="Arial" panose="020B0604020202020204" pitchFamily="34" charset="0"/>
+              <a:cs typeface="Arial" panose="020B0604020202020204" pitchFamily="34" charset="0"/>
+            </a:rPr>
+            <a:t>Model Evaluation</a:t>
+          </a:r>
+          <a:endParaRPr lang="en-IN" sz="1200" dirty="0">
+            <a:latin typeface="Arial" panose="020B0604020202020204" pitchFamily="34" charset="0"/>
+            <a:cs typeface="Arial" panose="020B0604020202020204" pitchFamily="34" charset="0"/>
+          </a:endParaRPr>
+        </a:p>
+      </dgm:t>
+    </dgm:pt>
+    <dgm:pt modelId="{466EF9C8-A3DF-4309-87BB-39EFF646C5E5}" type="parTrans" cxnId="{784B642C-7647-4A1D-9F5C-D326F04EE965}">
+      <dgm:prSet/>
+      <dgm:spPr/>
+      <dgm:t>
+        <a:bodyPr/>
+        <a:lstStyle/>
+        <a:p>
+          <a:endParaRPr lang="en-IN"/>
+        </a:p>
+      </dgm:t>
+    </dgm:pt>
+    <dgm:pt modelId="{9D3697A1-1521-4F73-9B51-194CE3AEEF3A}" type="sibTrans" cxnId="{784B642C-7647-4A1D-9F5C-D326F04EE965}">
+      <dgm:prSet/>
+      <dgm:spPr/>
+      <dgm:t>
+        <a:bodyPr/>
+        <a:lstStyle/>
+        <a:p>
+          <a:endParaRPr lang="en-IN"/>
+        </a:p>
+      </dgm:t>
+    </dgm:pt>
+    <dgm:pt modelId="{A082C7F6-ED1D-4E9D-9700-E8FBF165106B}">
+      <dgm:prSet phldrT="[Text]" phldr="0" custT="1"/>
+      <dgm:spPr/>
+      <dgm:t>
+        <a:bodyPr/>
+        <a:lstStyle/>
+        <a:p>
+          <a:r>
+            <a:rPr lang="en-IN" sz="1200" dirty="0">
+              <a:latin typeface="Arial" panose="020B0604020202020204" pitchFamily="34" charset="0"/>
+              <a:cs typeface="Arial" panose="020B0604020202020204" pitchFamily="34" charset="0"/>
+            </a:rPr>
+            <a:t>Result Visualization</a:t>
+          </a:r>
+        </a:p>
+      </dgm:t>
+    </dgm:pt>
+    <dgm:pt modelId="{D1A2BF49-2CC0-4709-9071-4E3CE473350A}" type="parTrans" cxnId="{BA1E6A8C-6966-4B99-B1B9-B1783087B1C6}">
+      <dgm:prSet/>
+      <dgm:spPr/>
+      <dgm:t>
+        <a:bodyPr/>
+        <a:lstStyle/>
+        <a:p>
+          <a:endParaRPr lang="en-IN"/>
+        </a:p>
+      </dgm:t>
+    </dgm:pt>
+    <dgm:pt modelId="{1AC2F4B1-2602-489B-B38B-BAACACE084F0}" type="sibTrans" cxnId="{BA1E6A8C-6966-4B99-B1B9-B1783087B1C6}">
+      <dgm:prSet/>
+      <dgm:spPr/>
+      <dgm:t>
+        <a:bodyPr/>
+        <a:lstStyle/>
+        <a:p>
+          <a:endParaRPr lang="en-IN"/>
+        </a:p>
+      </dgm:t>
+    </dgm:pt>
+    <dgm:pt modelId="{76FB633D-F2A8-41C6-929A-70AA5CEEB613}">
+      <dgm:prSet phldrT="[Text]" phldr="0" custT="1"/>
+      <dgm:spPr/>
+      <dgm:t>
+        <a:bodyPr/>
+        <a:lstStyle/>
+        <a:p>
+          <a:pPr>
+            <a:buNone/>
+          </a:pPr>
+          <a:r>
+            <a:rPr lang="en-IN" sz="1200" b="0" i="0" dirty="0">
+              <a:latin typeface="Arial" panose="020B0604020202020204" pitchFamily="34" charset="0"/>
+              <a:cs typeface="Arial" panose="020B0604020202020204" pitchFamily="34" charset="0"/>
+            </a:rPr>
+            <a:t>Identifying the Business Need</a:t>
+          </a:r>
+          <a:endParaRPr lang="en-IN" sz="1200" dirty="0">
+            <a:latin typeface="Arial" panose="020B0604020202020204" pitchFamily="34" charset="0"/>
+            <a:cs typeface="Arial" panose="020B0604020202020204" pitchFamily="34" charset="0"/>
+          </a:endParaRPr>
+        </a:p>
+      </dgm:t>
+    </dgm:pt>
+    <dgm:pt modelId="{F40EDCF4-18A2-41D7-8050-20F0E58FDA1B}" type="parTrans" cxnId="{F367139F-C900-486B-83EB-0E6474419F04}">
+      <dgm:prSet/>
+      <dgm:spPr/>
+      <dgm:t>
+        <a:bodyPr/>
+        <a:lstStyle/>
+        <a:p>
+          <a:endParaRPr lang="en-IN"/>
+        </a:p>
+      </dgm:t>
+    </dgm:pt>
+    <dgm:pt modelId="{5A9B0467-DC0F-4ECF-B0BB-C6FB969AE6CD}" type="sibTrans" cxnId="{F367139F-C900-486B-83EB-0E6474419F04}">
+      <dgm:prSet/>
+      <dgm:spPr/>
+      <dgm:t>
+        <a:bodyPr/>
+        <a:lstStyle/>
+        <a:p>
+          <a:endParaRPr lang="en-IN"/>
+        </a:p>
+      </dgm:t>
+    </dgm:pt>
+    <dgm:pt modelId="{CBC12B6B-5EFC-4FF0-AA6C-4871F65A9843}">
+      <dgm:prSet phldrT="[Text]" phldr="0" custT="1"/>
+      <dgm:spPr/>
+      <dgm:t>
+        <a:bodyPr/>
+        <a:lstStyle/>
+        <a:p>
+          <a:r>
+            <a:rPr lang="en-IN" sz="1200" dirty="0">
+              <a:latin typeface="Arial" panose="020B0604020202020204" pitchFamily="34" charset="0"/>
+              <a:cs typeface="Arial" panose="020B0604020202020204" pitchFamily="34" charset="0"/>
+            </a:rPr>
+            <a:t>Using the Smart Meter data for Data Source</a:t>
+          </a:r>
+        </a:p>
+      </dgm:t>
+    </dgm:pt>
+    <dgm:pt modelId="{AF7CC753-E074-46C7-883F-1BE9BF25F3B7}" type="parTrans" cxnId="{DA7A065C-3CCB-4D2F-BD7C-17871A8991B3}">
+      <dgm:prSet/>
+      <dgm:spPr/>
+      <dgm:t>
+        <a:bodyPr/>
+        <a:lstStyle/>
+        <a:p>
+          <a:endParaRPr lang="en-IN"/>
+        </a:p>
+      </dgm:t>
+    </dgm:pt>
+    <dgm:pt modelId="{D007F57C-3F99-4679-B2B3-34001A05FBA1}" type="sibTrans" cxnId="{DA7A065C-3CCB-4D2F-BD7C-17871A8991B3}">
+      <dgm:prSet/>
+      <dgm:spPr/>
+      <dgm:t>
+        <a:bodyPr/>
+        <a:lstStyle/>
+        <a:p>
+          <a:endParaRPr lang="en-IN"/>
+        </a:p>
+      </dgm:t>
+    </dgm:pt>
+    <dgm:pt modelId="{BFF29B69-DE1C-44F5-9AC8-44A95E2CF7B3}">
+      <dgm:prSet phldrT="[Text]" phldr="0" custT="1"/>
+      <dgm:spPr/>
+      <dgm:t>
+        <a:bodyPr/>
+        <a:lstStyle/>
+        <a:p>
+          <a:r>
+            <a:rPr lang="en-IN" sz="1200" dirty="0">
+              <a:latin typeface="Arial" panose="020B0604020202020204" pitchFamily="34" charset="0"/>
+              <a:cs typeface="Arial" panose="020B0604020202020204" pitchFamily="34" charset="0"/>
+            </a:rPr>
+            <a:t>Business Insights</a:t>
+          </a:r>
+        </a:p>
+      </dgm:t>
+    </dgm:pt>
+    <dgm:pt modelId="{6A499C7C-73F6-4715-9339-663F588B7758}" type="parTrans" cxnId="{49C35D29-BAEF-4A80-ADC0-4A6AB088851C}">
+      <dgm:prSet/>
+      <dgm:spPr/>
+      <dgm:t>
+        <a:bodyPr/>
+        <a:lstStyle/>
+        <a:p>
+          <a:endParaRPr lang="en-IN"/>
+        </a:p>
+      </dgm:t>
+    </dgm:pt>
+    <dgm:pt modelId="{3A6BC601-E55D-4485-824C-E8E2DFEB8563}" type="sibTrans" cxnId="{49C35D29-BAEF-4A80-ADC0-4A6AB088851C}">
+      <dgm:prSet/>
+      <dgm:spPr/>
+      <dgm:t>
+        <a:bodyPr/>
+        <a:lstStyle/>
+        <a:p>
+          <a:endParaRPr lang="en-IN"/>
+        </a:p>
+      </dgm:t>
+    </dgm:pt>
+    <dgm:pt modelId="{E4645BE2-C943-4B62-BE87-EDB484884C1B}">
+      <dgm:prSet phldrT="[Text]" phldr="0" custT="1"/>
+      <dgm:spPr/>
+      <dgm:t>
+        <a:bodyPr/>
+        <a:lstStyle/>
+        <a:p>
+          <a:r>
+            <a:rPr lang="en-IN" sz="1200" dirty="0">
+              <a:latin typeface="Arial" panose="020B0604020202020204" pitchFamily="34" charset="0"/>
+              <a:cs typeface="Arial" panose="020B0604020202020204" pitchFamily="34" charset="0"/>
+            </a:rPr>
+            <a:t>Recommendations</a:t>
+          </a:r>
+        </a:p>
+      </dgm:t>
+    </dgm:pt>
+    <dgm:pt modelId="{8D6DC500-A725-4E57-AFF8-AFA9C1C4E236}" type="parTrans" cxnId="{B500CAC1-EFB2-4A59-92CA-6B81D5B99B80}">
+      <dgm:prSet/>
+      <dgm:spPr/>
+      <dgm:t>
+        <a:bodyPr/>
+        <a:lstStyle/>
+        <a:p>
+          <a:endParaRPr lang="en-IN"/>
+        </a:p>
+      </dgm:t>
+    </dgm:pt>
+    <dgm:pt modelId="{D594F15E-C3E0-4AC4-96CA-EE6EBD267E9B}" type="sibTrans" cxnId="{B500CAC1-EFB2-4A59-92CA-6B81D5B99B80}">
+      <dgm:prSet/>
+      <dgm:spPr/>
+      <dgm:t>
+        <a:bodyPr/>
+        <a:lstStyle/>
+        <a:p>
+          <a:endParaRPr lang="en-IN"/>
+        </a:p>
+      </dgm:t>
+    </dgm:pt>
+    <dgm:pt modelId="{27FDFDD1-ED06-4470-AC74-57015AF6346E}" type="pres">
+      <dgm:prSet presAssocID="{E473DDF5-6CC4-4555-97CE-4AA4A41E792D}" presName="Name0" presStyleCnt="0">
+        <dgm:presLayoutVars>
+          <dgm:dir/>
+          <dgm:resizeHandles val="exact"/>
+        </dgm:presLayoutVars>
+      </dgm:prSet>
+      <dgm:spPr/>
+    </dgm:pt>
+    <dgm:pt modelId="{5B400373-7A8C-425D-B8AC-3A754B07DC22}" type="pres">
+      <dgm:prSet presAssocID="{E473DDF5-6CC4-4555-97CE-4AA4A41E792D}" presName="fgShape" presStyleLbl="fgShp" presStyleIdx="0" presStyleCnt="1"/>
+      <dgm:spPr/>
+    </dgm:pt>
+    <dgm:pt modelId="{42E37581-4955-4435-B4AF-92C67A9726E2}" type="pres">
+      <dgm:prSet presAssocID="{E473DDF5-6CC4-4555-97CE-4AA4A41E792D}" presName="linComp" presStyleCnt="0"/>
+      <dgm:spPr/>
+    </dgm:pt>
+    <dgm:pt modelId="{90BFC8F8-6D3E-419C-9B4A-76BAE703749A}" type="pres">
+      <dgm:prSet presAssocID="{76FB633D-F2A8-41C6-929A-70AA5CEEB613}" presName="compNode" presStyleCnt="0"/>
+      <dgm:spPr/>
+    </dgm:pt>
+    <dgm:pt modelId="{0CC94FEC-590C-448B-8EF7-2E1525147672}" type="pres">
+      <dgm:prSet presAssocID="{76FB633D-F2A8-41C6-929A-70AA5CEEB613}" presName="bkgdShape" presStyleLbl="node1" presStyleIdx="0" presStyleCnt="8"/>
+      <dgm:spPr/>
+    </dgm:pt>
+    <dgm:pt modelId="{E53E1E5F-1790-44E7-92C9-32F7AD4578A6}" type="pres">
+      <dgm:prSet presAssocID="{76FB633D-F2A8-41C6-929A-70AA5CEEB613}" presName="nodeTx" presStyleLbl="node1" presStyleIdx="0" presStyleCnt="8">
+        <dgm:presLayoutVars>
+          <dgm:bulletEnabled val="1"/>
+        </dgm:presLayoutVars>
+      </dgm:prSet>
+      <dgm:spPr/>
+    </dgm:pt>
+    <dgm:pt modelId="{4751235D-0A8F-4D8E-B008-AF123F764241}" type="pres">
+      <dgm:prSet presAssocID="{76FB633D-F2A8-41C6-929A-70AA5CEEB613}" presName="invisiNode" presStyleLbl="node1" presStyleIdx="0" presStyleCnt="8"/>
+      <dgm:spPr/>
+    </dgm:pt>
+    <dgm:pt modelId="{88373956-F9F3-4D52-BDBD-99E2DF54D0FB}" type="pres">
+      <dgm:prSet presAssocID="{76FB633D-F2A8-41C6-929A-70AA5CEEB613}" presName="imagNode" presStyleLbl="fgImgPlace1" presStyleIdx="0" presStyleCnt="8"/>
+      <dgm:spPr>
+        <a:blipFill>
+          <a:blip xmlns:r="http://schemas.openxmlformats.org/officeDocument/2006/relationships" r:embed="rId1"/>
+          <a:srcRect/>
+          <a:stretch>
+            <a:fillRect l="-75000" r="-75000"/>
+          </a:stretch>
+        </a:blipFill>
+      </dgm:spPr>
+    </dgm:pt>
+    <dgm:pt modelId="{800CF30B-8265-4364-9456-AABE5097F727}" type="pres">
+      <dgm:prSet presAssocID="{5A9B0467-DC0F-4ECF-B0BB-C6FB969AE6CD}" presName="sibTrans" presStyleLbl="sibTrans2D1" presStyleIdx="0" presStyleCnt="0"/>
+      <dgm:spPr/>
+    </dgm:pt>
+    <dgm:pt modelId="{27C587C7-701E-4313-B2DD-B35946D0D81D}" type="pres">
+      <dgm:prSet presAssocID="{CBC12B6B-5EFC-4FF0-AA6C-4871F65A9843}" presName="compNode" presStyleCnt="0"/>
+      <dgm:spPr/>
+    </dgm:pt>
+    <dgm:pt modelId="{C7AD48CA-5ABF-4650-9E4C-9860C11F033A}" type="pres">
+      <dgm:prSet presAssocID="{CBC12B6B-5EFC-4FF0-AA6C-4871F65A9843}" presName="bkgdShape" presStyleLbl="node1" presStyleIdx="1" presStyleCnt="8"/>
+      <dgm:spPr/>
+    </dgm:pt>
+    <dgm:pt modelId="{C1BB8DAA-27EB-44E2-A266-9DACEBF031F7}" type="pres">
+      <dgm:prSet presAssocID="{CBC12B6B-5EFC-4FF0-AA6C-4871F65A9843}" presName="nodeTx" presStyleLbl="node1" presStyleIdx="1" presStyleCnt="8">
+        <dgm:presLayoutVars>
+          <dgm:bulletEnabled val="1"/>
+        </dgm:presLayoutVars>
+      </dgm:prSet>
+      <dgm:spPr/>
+    </dgm:pt>
+    <dgm:pt modelId="{F99289B7-3094-4A49-B53C-516100324A29}" type="pres">
+      <dgm:prSet presAssocID="{CBC12B6B-5EFC-4FF0-AA6C-4871F65A9843}" presName="invisiNode" presStyleLbl="node1" presStyleIdx="1" presStyleCnt="8"/>
+      <dgm:spPr/>
+    </dgm:pt>
+    <dgm:pt modelId="{E79AC540-C4E1-487D-A7ED-FCF4A22871EC}" type="pres">
+      <dgm:prSet presAssocID="{CBC12B6B-5EFC-4FF0-AA6C-4871F65A9843}" presName="imagNode" presStyleLbl="fgImgPlace1" presStyleIdx="1" presStyleCnt="8"/>
+      <dgm:spPr>
+        <a:blipFill>
+          <a:blip xmlns:r="http://schemas.openxmlformats.org/officeDocument/2006/relationships" r:embed="rId2"/>
+          <a:srcRect/>
+          <a:stretch>
+            <a:fillRect l="-33000" r="-33000"/>
+          </a:stretch>
+        </a:blipFill>
+      </dgm:spPr>
+    </dgm:pt>
+    <dgm:pt modelId="{D1EE979B-28D7-4F11-9C66-81905D3B4A30}" type="pres">
+      <dgm:prSet presAssocID="{D007F57C-3F99-4679-B2B3-34001A05FBA1}" presName="sibTrans" presStyleLbl="sibTrans2D1" presStyleIdx="0" presStyleCnt="0"/>
+      <dgm:spPr/>
+    </dgm:pt>
+    <dgm:pt modelId="{E3D0E729-C2FA-485D-BAF3-5159C9E72134}" type="pres">
+      <dgm:prSet presAssocID="{5C935B75-5472-4070-AED7-5373AB9BE463}" presName="compNode" presStyleCnt="0"/>
+      <dgm:spPr/>
+    </dgm:pt>
+    <dgm:pt modelId="{1C8ABF4C-7AAE-4357-B629-6BE542B9FF94}" type="pres">
+      <dgm:prSet presAssocID="{5C935B75-5472-4070-AED7-5373AB9BE463}" presName="bkgdShape" presStyleLbl="node1" presStyleIdx="2" presStyleCnt="8"/>
+      <dgm:spPr/>
+    </dgm:pt>
+    <dgm:pt modelId="{D2F833C5-6C9A-4976-A733-856C405D4E08}" type="pres">
+      <dgm:prSet presAssocID="{5C935B75-5472-4070-AED7-5373AB9BE463}" presName="nodeTx" presStyleLbl="node1" presStyleIdx="2" presStyleCnt="8">
+        <dgm:presLayoutVars>
+          <dgm:bulletEnabled val="1"/>
+        </dgm:presLayoutVars>
+      </dgm:prSet>
+      <dgm:spPr/>
+    </dgm:pt>
+    <dgm:pt modelId="{3F0B880F-F28B-44CF-AEFF-A345104A7349}" type="pres">
+      <dgm:prSet presAssocID="{5C935B75-5472-4070-AED7-5373AB9BE463}" presName="invisiNode" presStyleLbl="node1" presStyleIdx="2" presStyleCnt="8"/>
+      <dgm:spPr/>
+    </dgm:pt>
+    <dgm:pt modelId="{0AFBA350-FFB5-4945-9327-61F504F4D162}" type="pres">
+      <dgm:prSet presAssocID="{5C935B75-5472-4070-AED7-5373AB9BE463}" presName="imagNode" presStyleLbl="fgImgPlace1" presStyleIdx="2" presStyleCnt="8" custScaleX="80953" custScaleY="64165"/>
+      <dgm:spPr>
+        <a:blipFill>
+          <a:blip xmlns:r="http://schemas.openxmlformats.org/officeDocument/2006/relationships" r:embed="rId3"/>
+          <a:srcRect/>
+          <a:stretch>
+            <a:fillRect l="-80000" r="-80000"/>
+          </a:stretch>
+        </a:blipFill>
+      </dgm:spPr>
+    </dgm:pt>
+    <dgm:pt modelId="{BB0DA191-9BA6-436C-92E1-8BA65FE43A07}" type="pres">
+      <dgm:prSet presAssocID="{6C5DBB6F-4539-4B11-866F-D4EECA7501E5}" presName="sibTrans" presStyleLbl="sibTrans2D1" presStyleIdx="0" presStyleCnt="0"/>
+      <dgm:spPr/>
+    </dgm:pt>
+    <dgm:pt modelId="{686903F0-434D-41EC-9241-B14E7D2CC243}" type="pres">
+      <dgm:prSet presAssocID="{0F697C53-6269-408E-A422-289A5106F59E}" presName="compNode" presStyleCnt="0"/>
+      <dgm:spPr/>
+    </dgm:pt>
+    <dgm:pt modelId="{DEA6E606-5E8E-49CC-BCD9-6A09371E116D}" type="pres">
+      <dgm:prSet presAssocID="{0F697C53-6269-408E-A422-289A5106F59E}" presName="bkgdShape" presStyleLbl="node1" presStyleIdx="3" presStyleCnt="8" custScaleX="116705"/>
+      <dgm:spPr/>
+    </dgm:pt>
+    <dgm:pt modelId="{2BF5255E-D7C4-4791-B227-3A74E0452D18}" type="pres">
+      <dgm:prSet presAssocID="{0F697C53-6269-408E-A422-289A5106F59E}" presName="nodeTx" presStyleLbl="node1" presStyleIdx="3" presStyleCnt="8">
+        <dgm:presLayoutVars>
+          <dgm:bulletEnabled val="1"/>
+        </dgm:presLayoutVars>
+      </dgm:prSet>
+      <dgm:spPr/>
+    </dgm:pt>
+    <dgm:pt modelId="{02A45247-92BC-4012-BC95-BED676762B1C}" type="pres">
+      <dgm:prSet presAssocID="{0F697C53-6269-408E-A422-289A5106F59E}" presName="invisiNode" presStyleLbl="node1" presStyleIdx="3" presStyleCnt="8"/>
+      <dgm:spPr/>
+    </dgm:pt>
+    <dgm:pt modelId="{0723FF23-6A8C-47DF-8B78-97F871779FF6}" type="pres">
+      <dgm:prSet presAssocID="{0F697C53-6269-408E-A422-289A5106F59E}" presName="imagNode" presStyleLbl="fgImgPlace1" presStyleIdx="3" presStyleCnt="8" custScaleX="85141" custScaleY="82147"/>
+      <dgm:spPr>
+        <a:blipFill>
+          <a:blip xmlns:r="http://schemas.openxmlformats.org/officeDocument/2006/relationships" r:embed="rId4"/>
+          <a:srcRect/>
+          <a:stretch>
+            <a:fillRect l="-114000" r="-114000"/>
+          </a:stretch>
+        </a:blipFill>
+      </dgm:spPr>
+    </dgm:pt>
+    <dgm:pt modelId="{188AB63F-DD7D-4F6E-AB76-B508B1111421}" type="pres">
+      <dgm:prSet presAssocID="{CF18BEC3-408C-4226-B585-DE465D7D769E}" presName="sibTrans" presStyleLbl="sibTrans2D1" presStyleIdx="0" presStyleCnt="0"/>
+      <dgm:spPr/>
+    </dgm:pt>
+    <dgm:pt modelId="{15F2AB94-D271-4C2F-9049-77EAEAAE5209}" type="pres">
+      <dgm:prSet presAssocID="{FF906C97-A028-4D8F-A7CD-381DF6F98A33}" presName="compNode" presStyleCnt="0"/>
+      <dgm:spPr/>
+    </dgm:pt>
+    <dgm:pt modelId="{F15337DC-7A35-4420-9686-A6A80CCC7E9F}" type="pres">
+      <dgm:prSet presAssocID="{FF906C97-A028-4D8F-A7CD-381DF6F98A33}" presName="bkgdShape" presStyleLbl="node1" presStyleIdx="4" presStyleCnt="8"/>
+      <dgm:spPr/>
+    </dgm:pt>
+    <dgm:pt modelId="{CBDDE9D8-71EF-4493-BB64-45F4252561FA}" type="pres">
+      <dgm:prSet presAssocID="{FF906C97-A028-4D8F-A7CD-381DF6F98A33}" presName="nodeTx" presStyleLbl="node1" presStyleIdx="4" presStyleCnt="8">
+        <dgm:presLayoutVars>
+          <dgm:bulletEnabled val="1"/>
+        </dgm:presLayoutVars>
+      </dgm:prSet>
+      <dgm:spPr/>
+    </dgm:pt>
+    <dgm:pt modelId="{FCA0B292-970E-4164-ABB6-DC5D46F64046}" type="pres">
+      <dgm:prSet presAssocID="{FF906C97-A028-4D8F-A7CD-381DF6F98A33}" presName="invisiNode" presStyleLbl="node1" presStyleIdx="4" presStyleCnt="8"/>
+      <dgm:spPr/>
+    </dgm:pt>
+    <dgm:pt modelId="{8E838C5F-CF00-4FEF-BCA0-617384CBF917}" type="pres">
+      <dgm:prSet presAssocID="{FF906C97-A028-4D8F-A7CD-381DF6F98A33}" presName="imagNode" presStyleLbl="fgImgPlace1" presStyleIdx="4" presStyleCnt="8"/>
+      <dgm:spPr>
+        <a:blipFill>
+          <a:blip xmlns:r="http://schemas.openxmlformats.org/officeDocument/2006/relationships" r:embed="rId5"/>
+          <a:srcRect/>
+          <a:stretch>
+            <a:fillRect l="-56000" r="-56000"/>
+          </a:stretch>
+        </a:blipFill>
+      </dgm:spPr>
+    </dgm:pt>
+    <dgm:pt modelId="{73E8CBFE-CA64-4E86-BDC8-761304174C9E}" type="pres">
+      <dgm:prSet presAssocID="{9D3697A1-1521-4F73-9B51-194CE3AEEF3A}" presName="sibTrans" presStyleLbl="sibTrans2D1" presStyleIdx="0" presStyleCnt="0"/>
+      <dgm:spPr/>
+    </dgm:pt>
+    <dgm:pt modelId="{A5FC7443-89AE-4015-98EF-07449E712FB6}" type="pres">
+      <dgm:prSet presAssocID="{A082C7F6-ED1D-4E9D-9700-E8FBF165106B}" presName="compNode" presStyleCnt="0"/>
+      <dgm:spPr/>
+    </dgm:pt>
+    <dgm:pt modelId="{82FA872A-8D83-4B88-9389-85F63E71C640}" type="pres">
+      <dgm:prSet presAssocID="{A082C7F6-ED1D-4E9D-9700-E8FBF165106B}" presName="bkgdShape" presStyleLbl="node1" presStyleIdx="5" presStyleCnt="8" custScaleX="118890"/>
+      <dgm:spPr/>
+    </dgm:pt>
+    <dgm:pt modelId="{89AE649D-6180-4740-B3F6-E6751AA6239B}" type="pres">
+      <dgm:prSet presAssocID="{A082C7F6-ED1D-4E9D-9700-E8FBF165106B}" presName="nodeTx" presStyleLbl="node1" presStyleIdx="5" presStyleCnt="8">
+        <dgm:presLayoutVars>
+          <dgm:bulletEnabled val="1"/>
+        </dgm:presLayoutVars>
+      </dgm:prSet>
+      <dgm:spPr/>
+    </dgm:pt>
+    <dgm:pt modelId="{F1F72DD6-9E97-4C71-A37B-C002438D344F}" type="pres">
+      <dgm:prSet presAssocID="{A082C7F6-ED1D-4E9D-9700-E8FBF165106B}" presName="invisiNode" presStyleLbl="node1" presStyleIdx="5" presStyleCnt="8"/>
+      <dgm:spPr/>
+    </dgm:pt>
+    <dgm:pt modelId="{5CBC1484-FCAE-4250-96F3-291C828804B8}" type="pres">
+      <dgm:prSet presAssocID="{A082C7F6-ED1D-4E9D-9700-E8FBF165106B}" presName="imagNode" presStyleLbl="fgImgPlace1" presStyleIdx="5" presStyleCnt="8"/>
+      <dgm:spPr>
+        <a:blipFill>
+          <a:blip xmlns:r="http://schemas.openxmlformats.org/officeDocument/2006/relationships" r:embed="rId6"/>
+          <a:srcRect/>
+          <a:stretch>
+            <a:fillRect l="-17000" r="-17000"/>
+          </a:stretch>
+        </a:blipFill>
+      </dgm:spPr>
+    </dgm:pt>
+    <dgm:pt modelId="{E79B9467-0990-4994-84F5-B374ABDD20E8}" type="pres">
+      <dgm:prSet presAssocID="{1AC2F4B1-2602-489B-B38B-BAACACE084F0}" presName="sibTrans" presStyleLbl="sibTrans2D1" presStyleIdx="0" presStyleCnt="0"/>
+      <dgm:spPr/>
+    </dgm:pt>
+    <dgm:pt modelId="{6B54F2E0-8C78-437D-8704-A122B28E0959}" type="pres">
+      <dgm:prSet presAssocID="{BFF29B69-DE1C-44F5-9AC8-44A95E2CF7B3}" presName="compNode" presStyleCnt="0"/>
+      <dgm:spPr/>
+    </dgm:pt>
+    <dgm:pt modelId="{27A03B1F-361E-4CAF-B1D9-CBC580B45DB5}" type="pres">
+      <dgm:prSet presAssocID="{BFF29B69-DE1C-44F5-9AC8-44A95E2CF7B3}" presName="bkgdShape" presStyleLbl="node1" presStyleIdx="6" presStyleCnt="8"/>
+      <dgm:spPr/>
+    </dgm:pt>
+    <dgm:pt modelId="{F7E4CDE2-BF27-4999-B760-3D844AB1AF5D}" type="pres">
+      <dgm:prSet presAssocID="{BFF29B69-DE1C-44F5-9AC8-44A95E2CF7B3}" presName="nodeTx" presStyleLbl="node1" presStyleIdx="6" presStyleCnt="8">
+        <dgm:presLayoutVars>
+          <dgm:bulletEnabled val="1"/>
+        </dgm:presLayoutVars>
+      </dgm:prSet>
+      <dgm:spPr/>
+    </dgm:pt>
+    <dgm:pt modelId="{29D5EA60-0EBC-4704-80E6-FB9A63744A6C}" type="pres">
+      <dgm:prSet presAssocID="{BFF29B69-DE1C-44F5-9AC8-44A95E2CF7B3}" presName="invisiNode" presStyleLbl="node1" presStyleIdx="6" presStyleCnt="8"/>
+      <dgm:spPr/>
+    </dgm:pt>
+    <dgm:pt modelId="{C1CC7A32-6758-4471-AE91-345AA4746C85}" type="pres">
+      <dgm:prSet presAssocID="{BFF29B69-DE1C-44F5-9AC8-44A95E2CF7B3}" presName="imagNode" presStyleLbl="fgImgPlace1" presStyleIdx="6" presStyleCnt="8"/>
+      <dgm:spPr>
+        <a:blipFill>
+          <a:blip xmlns:r="http://schemas.openxmlformats.org/officeDocument/2006/relationships" r:embed="rId7"/>
+          <a:srcRect/>
+          <a:stretch>
+            <a:fillRect l="-29000" r="-29000"/>
+          </a:stretch>
+        </a:blipFill>
+      </dgm:spPr>
+    </dgm:pt>
+    <dgm:pt modelId="{6F6722E1-D49B-478B-88F0-F0B6BBF309A9}" type="pres">
+      <dgm:prSet presAssocID="{3A6BC601-E55D-4485-824C-E8E2DFEB8563}" presName="sibTrans" presStyleLbl="sibTrans2D1" presStyleIdx="0" presStyleCnt="0"/>
+      <dgm:spPr/>
+    </dgm:pt>
+    <dgm:pt modelId="{5E820923-E8EA-4CFA-BDF9-6885C12B182E}" type="pres">
+      <dgm:prSet presAssocID="{E4645BE2-C943-4B62-BE87-EDB484884C1B}" presName="compNode" presStyleCnt="0"/>
+      <dgm:spPr/>
+    </dgm:pt>
+    <dgm:pt modelId="{B2BABDCC-AE96-4358-939B-E6C2C1880590}" type="pres">
+      <dgm:prSet presAssocID="{E4645BE2-C943-4B62-BE87-EDB484884C1B}" presName="bkgdShape" presStyleLbl="node1" presStyleIdx="7" presStyleCnt="8"/>
+      <dgm:spPr/>
+    </dgm:pt>
+    <dgm:pt modelId="{BB97FA89-252A-4B01-9518-4E9C2732D467}" type="pres">
+      <dgm:prSet presAssocID="{E4645BE2-C943-4B62-BE87-EDB484884C1B}" presName="nodeTx" presStyleLbl="node1" presStyleIdx="7" presStyleCnt="8">
+        <dgm:presLayoutVars>
+          <dgm:bulletEnabled val="1"/>
+        </dgm:presLayoutVars>
+      </dgm:prSet>
+      <dgm:spPr/>
+    </dgm:pt>
+    <dgm:pt modelId="{49D4E6F1-74D0-4F44-82FA-0704942619A8}" type="pres">
+      <dgm:prSet presAssocID="{E4645BE2-C943-4B62-BE87-EDB484884C1B}" presName="invisiNode" presStyleLbl="node1" presStyleIdx="7" presStyleCnt="8"/>
+      <dgm:spPr/>
+    </dgm:pt>
+    <dgm:pt modelId="{F6FBB88D-73B9-4281-8920-27D4E68263B6}" type="pres">
+      <dgm:prSet presAssocID="{E4645BE2-C943-4B62-BE87-EDB484884C1B}" presName="imagNode" presStyleLbl="fgImgPlace1" presStyleIdx="7" presStyleCnt="8"/>
+      <dgm:spPr>
+        <a:blipFill>
+          <a:blip xmlns:r="http://schemas.openxmlformats.org/officeDocument/2006/relationships" r:embed="rId8"/>
+          <a:srcRect/>
+          <a:stretch>
+            <a:fillRect l="-9000" r="-9000"/>
+          </a:stretch>
+        </a:blipFill>
+      </dgm:spPr>
+    </dgm:pt>
+  </dgm:ptLst>
+  <dgm:cxnLst>
+    <dgm:cxn modelId="{F107621F-9859-413C-ABA4-9B70B492B4B8}" type="presOf" srcId="{D007F57C-3F99-4679-B2B3-34001A05FBA1}" destId="{D1EE979B-28D7-4F11-9C66-81905D3B4A30}" srcOrd="0" destOrd="0" presId="urn:microsoft.com/office/officeart/2005/8/layout/hList7"/>
+    <dgm:cxn modelId="{BCCFEA26-FBA8-4C3D-97CA-9362588742F9}" type="presOf" srcId="{1AC2F4B1-2602-489B-B38B-BAACACE084F0}" destId="{E79B9467-0990-4994-84F5-B374ABDD20E8}" srcOrd="0" destOrd="0" presId="urn:microsoft.com/office/officeart/2005/8/layout/hList7"/>
+    <dgm:cxn modelId="{49C35D29-BAEF-4A80-ADC0-4A6AB088851C}" srcId="{E473DDF5-6CC4-4555-97CE-4AA4A41E792D}" destId="{BFF29B69-DE1C-44F5-9AC8-44A95E2CF7B3}" srcOrd="6" destOrd="0" parTransId="{6A499C7C-73F6-4715-9339-663F588B7758}" sibTransId="{3A6BC601-E55D-4485-824C-E8E2DFEB8563}"/>
+    <dgm:cxn modelId="{784B642C-7647-4A1D-9F5C-D326F04EE965}" srcId="{E473DDF5-6CC4-4555-97CE-4AA4A41E792D}" destId="{FF906C97-A028-4D8F-A7CD-381DF6F98A33}" srcOrd="4" destOrd="0" parTransId="{466EF9C8-A3DF-4309-87BB-39EFF646C5E5}" sibTransId="{9D3697A1-1521-4F73-9B51-194CE3AEEF3A}"/>
+    <dgm:cxn modelId="{A6D20B34-43E2-4E6C-A662-38322F51868C}" type="presOf" srcId="{E4645BE2-C943-4B62-BE87-EDB484884C1B}" destId="{BB97FA89-252A-4B01-9518-4E9C2732D467}" srcOrd="1" destOrd="0" presId="urn:microsoft.com/office/officeart/2005/8/layout/hList7"/>
+    <dgm:cxn modelId="{C48CFB34-0940-4065-B241-961292A4A046}" type="presOf" srcId="{5C935B75-5472-4070-AED7-5373AB9BE463}" destId="{1C8ABF4C-7AAE-4357-B629-6BE542B9FF94}" srcOrd="0" destOrd="0" presId="urn:microsoft.com/office/officeart/2005/8/layout/hList7"/>
+    <dgm:cxn modelId="{31315C3C-5961-4EC0-955A-99D7A53A9C2A}" type="presOf" srcId="{BFF29B69-DE1C-44F5-9AC8-44A95E2CF7B3}" destId="{27A03B1F-361E-4CAF-B1D9-CBC580B45DB5}" srcOrd="0" destOrd="0" presId="urn:microsoft.com/office/officeart/2005/8/layout/hList7"/>
+    <dgm:cxn modelId="{DA7A065C-3CCB-4D2F-BD7C-17871A8991B3}" srcId="{E473DDF5-6CC4-4555-97CE-4AA4A41E792D}" destId="{CBC12B6B-5EFC-4FF0-AA6C-4871F65A9843}" srcOrd="1" destOrd="0" parTransId="{AF7CC753-E074-46C7-883F-1BE9BF25F3B7}" sibTransId="{D007F57C-3F99-4679-B2B3-34001A05FBA1}"/>
+    <dgm:cxn modelId="{7D5AB15E-829D-45F6-AFFD-EB5CEEA79F4D}" type="presOf" srcId="{FF906C97-A028-4D8F-A7CD-381DF6F98A33}" destId="{CBDDE9D8-71EF-4493-BB64-45F4252561FA}" srcOrd="1" destOrd="0" presId="urn:microsoft.com/office/officeart/2005/8/layout/hList7"/>
+    <dgm:cxn modelId="{83845461-5A15-45F5-9A2C-85DFE3625FA1}" srcId="{E473DDF5-6CC4-4555-97CE-4AA4A41E792D}" destId="{5C935B75-5472-4070-AED7-5373AB9BE463}" srcOrd="2" destOrd="0" parTransId="{B49CE075-6BB6-4E20-AD7B-5F7DE92C2197}" sibTransId="{6C5DBB6F-4539-4B11-866F-D4EECA7501E5}"/>
+    <dgm:cxn modelId="{DA67B464-20B1-4E3E-A12C-DF0A9C9B9E0D}" srcId="{E473DDF5-6CC4-4555-97CE-4AA4A41E792D}" destId="{0F697C53-6269-408E-A422-289A5106F59E}" srcOrd="3" destOrd="0" parTransId="{09AAD0A7-61FE-4526-8CAA-30FCE8C0F1A1}" sibTransId="{CF18BEC3-408C-4226-B585-DE465D7D769E}"/>
+    <dgm:cxn modelId="{88B2C34D-BB43-4EBD-95CF-CC5C835D4DCB}" type="presOf" srcId="{CBC12B6B-5EFC-4FF0-AA6C-4871F65A9843}" destId="{C7AD48CA-5ABF-4650-9E4C-9860C11F033A}" srcOrd="0" destOrd="0" presId="urn:microsoft.com/office/officeart/2005/8/layout/hList7"/>
+    <dgm:cxn modelId="{5C3D8471-DDC9-4F01-BBD2-574CCB29D1C1}" type="presOf" srcId="{5A9B0467-DC0F-4ECF-B0BB-C6FB969AE6CD}" destId="{800CF30B-8265-4364-9456-AABE5097F727}" srcOrd="0" destOrd="0" presId="urn:microsoft.com/office/officeart/2005/8/layout/hList7"/>
+    <dgm:cxn modelId="{C274C771-DACF-4304-80D1-B52AE3C97562}" type="presOf" srcId="{5C935B75-5472-4070-AED7-5373AB9BE463}" destId="{D2F833C5-6C9A-4976-A733-856C405D4E08}" srcOrd="1" destOrd="0" presId="urn:microsoft.com/office/officeart/2005/8/layout/hList7"/>
+    <dgm:cxn modelId="{F7B7A852-065C-4073-A0A3-9E4D39425DFF}" type="presOf" srcId="{0F697C53-6269-408E-A422-289A5106F59E}" destId="{DEA6E606-5E8E-49CC-BCD9-6A09371E116D}" srcOrd="0" destOrd="0" presId="urn:microsoft.com/office/officeart/2005/8/layout/hList7"/>
+    <dgm:cxn modelId="{B8F3CC75-8765-4923-82CB-DE9DDEBCA104}" type="presOf" srcId="{CF18BEC3-408C-4226-B585-DE465D7D769E}" destId="{188AB63F-DD7D-4F6E-AB76-B508B1111421}" srcOrd="0" destOrd="0" presId="urn:microsoft.com/office/officeart/2005/8/layout/hList7"/>
+    <dgm:cxn modelId="{E0EEB05A-65D5-438F-BA04-E8390943D102}" type="presOf" srcId="{BFF29B69-DE1C-44F5-9AC8-44A95E2CF7B3}" destId="{F7E4CDE2-BF27-4999-B760-3D844AB1AF5D}" srcOrd="1" destOrd="0" presId="urn:microsoft.com/office/officeart/2005/8/layout/hList7"/>
+    <dgm:cxn modelId="{7FCDBB87-84C5-4E74-9BDF-FA154F7D68A3}" type="presOf" srcId="{E4645BE2-C943-4B62-BE87-EDB484884C1B}" destId="{B2BABDCC-AE96-4358-939B-E6C2C1880590}" srcOrd="0" destOrd="0" presId="urn:microsoft.com/office/officeart/2005/8/layout/hList7"/>
+    <dgm:cxn modelId="{BA1E6A8C-6966-4B99-B1B9-B1783087B1C6}" srcId="{E473DDF5-6CC4-4555-97CE-4AA4A41E792D}" destId="{A082C7F6-ED1D-4E9D-9700-E8FBF165106B}" srcOrd="5" destOrd="0" parTransId="{D1A2BF49-2CC0-4709-9071-4E3CE473350A}" sibTransId="{1AC2F4B1-2602-489B-B38B-BAACACE084F0}"/>
+    <dgm:cxn modelId="{1D3BD597-4AB9-4A7A-BAAD-BA7DD1C00D8C}" type="presOf" srcId="{9D3697A1-1521-4F73-9B51-194CE3AEEF3A}" destId="{73E8CBFE-CA64-4E86-BDC8-761304174C9E}" srcOrd="0" destOrd="0" presId="urn:microsoft.com/office/officeart/2005/8/layout/hList7"/>
+    <dgm:cxn modelId="{CAAD6098-0402-4C39-AAB3-9712998DE6C6}" type="presOf" srcId="{0F697C53-6269-408E-A422-289A5106F59E}" destId="{2BF5255E-D7C4-4791-B227-3A74E0452D18}" srcOrd="1" destOrd="0" presId="urn:microsoft.com/office/officeart/2005/8/layout/hList7"/>
+    <dgm:cxn modelId="{F367139F-C900-486B-83EB-0E6474419F04}" srcId="{E473DDF5-6CC4-4555-97CE-4AA4A41E792D}" destId="{76FB633D-F2A8-41C6-929A-70AA5CEEB613}" srcOrd="0" destOrd="0" parTransId="{F40EDCF4-18A2-41D7-8050-20F0E58FDA1B}" sibTransId="{5A9B0467-DC0F-4ECF-B0BB-C6FB969AE6CD}"/>
+    <dgm:cxn modelId="{893295A7-8149-41F1-94DF-20AC9F2E4877}" type="presOf" srcId="{A082C7F6-ED1D-4E9D-9700-E8FBF165106B}" destId="{82FA872A-8D83-4B88-9389-85F63E71C640}" srcOrd="0" destOrd="0" presId="urn:microsoft.com/office/officeart/2005/8/layout/hList7"/>
+    <dgm:cxn modelId="{F92C81B7-8E49-402A-B433-4F90D8805F8D}" type="presOf" srcId="{A082C7F6-ED1D-4E9D-9700-E8FBF165106B}" destId="{89AE649D-6180-4740-B3F6-E6751AA6239B}" srcOrd="1" destOrd="0" presId="urn:microsoft.com/office/officeart/2005/8/layout/hList7"/>
+    <dgm:cxn modelId="{276A6EBC-23CD-4186-9E5A-A6EC0BF0F22D}" type="presOf" srcId="{76FB633D-F2A8-41C6-929A-70AA5CEEB613}" destId="{0CC94FEC-590C-448B-8EF7-2E1525147672}" srcOrd="0" destOrd="0" presId="urn:microsoft.com/office/officeart/2005/8/layout/hList7"/>
+    <dgm:cxn modelId="{F2C61CC1-BC95-4B02-B63D-7DE83BB48DD8}" type="presOf" srcId="{76FB633D-F2A8-41C6-929A-70AA5CEEB613}" destId="{E53E1E5F-1790-44E7-92C9-32F7AD4578A6}" srcOrd="1" destOrd="0" presId="urn:microsoft.com/office/officeart/2005/8/layout/hList7"/>
+    <dgm:cxn modelId="{B500CAC1-EFB2-4A59-92CA-6B81D5B99B80}" srcId="{E473DDF5-6CC4-4555-97CE-4AA4A41E792D}" destId="{E4645BE2-C943-4B62-BE87-EDB484884C1B}" srcOrd="7" destOrd="0" parTransId="{8D6DC500-A725-4E57-AFF8-AFA9C1C4E236}" sibTransId="{D594F15E-C3E0-4AC4-96CA-EE6EBD267E9B}"/>
+    <dgm:cxn modelId="{0A539DC6-E1EE-429B-A287-0E9FF09B55B9}" type="presOf" srcId="{E473DDF5-6CC4-4555-97CE-4AA4A41E792D}" destId="{27FDFDD1-ED06-4470-AC74-57015AF6346E}" srcOrd="0" destOrd="0" presId="urn:microsoft.com/office/officeart/2005/8/layout/hList7"/>
+    <dgm:cxn modelId="{1F8E36E7-7C42-4761-B7D9-CE06436E9BC4}" type="presOf" srcId="{3A6BC601-E55D-4485-824C-E8E2DFEB8563}" destId="{6F6722E1-D49B-478B-88F0-F0B6BBF309A9}" srcOrd="0" destOrd="0" presId="urn:microsoft.com/office/officeart/2005/8/layout/hList7"/>
+    <dgm:cxn modelId="{05FC6EEB-6B59-4606-A333-9EE0F9BB54C8}" type="presOf" srcId="{CBC12B6B-5EFC-4FF0-AA6C-4871F65A9843}" destId="{C1BB8DAA-27EB-44E2-A266-9DACEBF031F7}" srcOrd="1" destOrd="0" presId="urn:microsoft.com/office/officeart/2005/8/layout/hList7"/>
+    <dgm:cxn modelId="{E5E0E0F5-322C-4CC7-AAEF-4A98CC80839C}" type="presOf" srcId="{FF906C97-A028-4D8F-A7CD-381DF6F98A33}" destId="{F15337DC-7A35-4420-9686-A6A80CCC7E9F}" srcOrd="0" destOrd="0" presId="urn:microsoft.com/office/officeart/2005/8/layout/hList7"/>
+    <dgm:cxn modelId="{8DF8FEF9-BC5F-4D07-B678-2E87DB448A27}" type="presOf" srcId="{6C5DBB6F-4539-4B11-866F-D4EECA7501E5}" destId="{BB0DA191-9BA6-436C-92E1-8BA65FE43A07}" srcOrd="0" destOrd="0" presId="urn:microsoft.com/office/officeart/2005/8/layout/hList7"/>
+    <dgm:cxn modelId="{4EDC09D3-D1F0-4B6B-A01D-2F9D2DBBCF17}" type="presParOf" srcId="{27FDFDD1-ED06-4470-AC74-57015AF6346E}" destId="{5B400373-7A8C-425D-B8AC-3A754B07DC22}" srcOrd="0" destOrd="0" presId="urn:microsoft.com/office/officeart/2005/8/layout/hList7"/>
+    <dgm:cxn modelId="{DD3962C7-007C-42F4-AAC3-841FBC13A72A}" type="presParOf" srcId="{27FDFDD1-ED06-4470-AC74-57015AF6346E}" destId="{42E37581-4955-4435-B4AF-92C67A9726E2}" srcOrd="1" destOrd="0" presId="urn:microsoft.com/office/officeart/2005/8/layout/hList7"/>
+    <dgm:cxn modelId="{D3160CE7-6EBF-45DA-9932-FD0CED65175B}" type="presParOf" srcId="{42E37581-4955-4435-B4AF-92C67A9726E2}" destId="{90BFC8F8-6D3E-419C-9B4A-76BAE703749A}" srcOrd="0" destOrd="0" presId="urn:microsoft.com/office/officeart/2005/8/layout/hList7"/>
+    <dgm:cxn modelId="{0081DCCD-27E8-42D0-A51B-55560223EB30}" type="presParOf" srcId="{90BFC8F8-6D3E-419C-9B4A-76BAE703749A}" destId="{0CC94FEC-590C-448B-8EF7-2E1525147672}" srcOrd="0" destOrd="0" presId="urn:microsoft.com/office/officeart/2005/8/layout/hList7"/>
+    <dgm:cxn modelId="{D014D4D2-5BBB-4936-8BF0-E9E67BF7298B}" type="presParOf" srcId="{90BFC8F8-6D3E-419C-9B4A-76BAE703749A}" destId="{E53E1E5F-1790-44E7-92C9-32F7AD4578A6}" srcOrd="1" destOrd="0" presId="urn:microsoft.com/office/officeart/2005/8/layout/hList7"/>
+    <dgm:cxn modelId="{6060FE50-425E-4A2C-A6BC-695A5815CBF3}" type="presParOf" srcId="{90BFC8F8-6D3E-419C-9B4A-76BAE703749A}" destId="{4751235D-0A8F-4D8E-B008-AF123F764241}" srcOrd="2" destOrd="0" presId="urn:microsoft.com/office/officeart/2005/8/layout/hList7"/>
+    <dgm:cxn modelId="{4F013320-27C5-4CF9-A898-E757DA7D12E6}" type="presParOf" srcId="{90BFC8F8-6D3E-419C-9B4A-76BAE703749A}" destId="{88373956-F9F3-4D52-BDBD-99E2DF54D0FB}" srcOrd="3" destOrd="0" presId="urn:microsoft.com/office/officeart/2005/8/layout/hList7"/>
+    <dgm:cxn modelId="{CBCEE50E-6046-4B45-AFE1-4207E17D009C}" type="presParOf" srcId="{42E37581-4955-4435-B4AF-92C67A9726E2}" destId="{800CF30B-8265-4364-9456-AABE5097F727}" srcOrd="1" destOrd="0" presId="urn:microsoft.com/office/officeart/2005/8/layout/hList7"/>
+    <dgm:cxn modelId="{3CA0A1EE-B52D-461E-8818-8C12A8F43B28}" type="presParOf" srcId="{42E37581-4955-4435-B4AF-92C67A9726E2}" destId="{27C587C7-701E-4313-B2DD-B35946D0D81D}" srcOrd="2" destOrd="0" presId="urn:microsoft.com/office/officeart/2005/8/layout/hList7"/>
+    <dgm:cxn modelId="{AE1EE3BF-8926-4DC7-8713-B3A037B1B6BF}" type="presParOf" srcId="{27C587C7-701E-4313-B2DD-B35946D0D81D}" destId="{C7AD48CA-5ABF-4650-9E4C-9860C11F033A}" srcOrd="0" destOrd="0" presId="urn:microsoft.com/office/officeart/2005/8/layout/hList7"/>
+    <dgm:cxn modelId="{19D19243-E8FF-4FBB-9592-D4CD613057E0}" type="presParOf" srcId="{27C587C7-701E-4313-B2DD-B35946D0D81D}" destId="{C1BB8DAA-27EB-44E2-A266-9DACEBF031F7}" srcOrd="1" destOrd="0" presId="urn:microsoft.com/office/officeart/2005/8/layout/hList7"/>
+    <dgm:cxn modelId="{85A6B9BF-58F8-45D2-B2DB-838426830D68}" type="presParOf" srcId="{27C587C7-701E-4313-B2DD-B35946D0D81D}" destId="{F99289B7-3094-4A49-B53C-516100324A29}" srcOrd="2" destOrd="0" presId="urn:microsoft.com/office/officeart/2005/8/layout/hList7"/>
+    <dgm:cxn modelId="{824A969A-7676-4E92-85C4-A1B286A04C5E}" type="presParOf" srcId="{27C587C7-701E-4313-B2DD-B35946D0D81D}" destId="{E79AC540-C4E1-487D-A7ED-FCF4A22871EC}" srcOrd="3" destOrd="0" presId="urn:microsoft.com/office/officeart/2005/8/layout/hList7"/>
+    <dgm:cxn modelId="{ACD10AD5-CFA6-4C84-9610-F5ACC0BE818F}" type="presParOf" srcId="{42E37581-4955-4435-B4AF-92C67A9726E2}" destId="{D1EE979B-28D7-4F11-9C66-81905D3B4A30}" srcOrd="3" destOrd="0" presId="urn:microsoft.com/office/officeart/2005/8/layout/hList7"/>
+    <dgm:cxn modelId="{06076BAB-3384-4F6B-A606-1813679602CE}" type="presParOf" srcId="{42E37581-4955-4435-B4AF-92C67A9726E2}" destId="{E3D0E729-C2FA-485D-BAF3-5159C9E72134}" srcOrd="4" destOrd="0" presId="urn:microsoft.com/office/officeart/2005/8/layout/hList7"/>
+    <dgm:cxn modelId="{36E48D35-F8AD-4068-AB03-A4DF7532D7E3}" type="presParOf" srcId="{E3D0E729-C2FA-485D-BAF3-5159C9E72134}" destId="{1C8ABF4C-7AAE-4357-B629-6BE542B9FF94}" srcOrd="0" destOrd="0" presId="urn:microsoft.com/office/officeart/2005/8/layout/hList7"/>
+    <dgm:cxn modelId="{1B8C522E-BE6E-4F33-935D-73ACE56DCDA3}" type="presParOf" srcId="{E3D0E729-C2FA-485D-BAF3-5159C9E72134}" destId="{D2F833C5-6C9A-4976-A733-856C405D4E08}" srcOrd="1" destOrd="0" presId="urn:microsoft.com/office/officeart/2005/8/layout/hList7"/>
+    <dgm:cxn modelId="{F0FF8BE2-DD09-4551-89E5-55B7DC3A5C5E}" type="presParOf" srcId="{E3D0E729-C2FA-485D-BAF3-5159C9E72134}" destId="{3F0B880F-F28B-44CF-AEFF-A345104A7349}" srcOrd="2" destOrd="0" presId="urn:microsoft.com/office/officeart/2005/8/layout/hList7"/>
+    <dgm:cxn modelId="{0AFA8149-F35D-45C7-A54D-1E095ACEE170}" type="presParOf" srcId="{E3D0E729-C2FA-485D-BAF3-5159C9E72134}" destId="{0AFBA350-FFB5-4945-9327-61F504F4D162}" srcOrd="3" destOrd="0" presId="urn:microsoft.com/office/officeart/2005/8/layout/hList7"/>
+    <dgm:cxn modelId="{9BF3719A-0BD7-432C-9EDB-FC7B02776CCF}" type="presParOf" srcId="{42E37581-4955-4435-B4AF-92C67A9726E2}" destId="{BB0DA191-9BA6-436C-92E1-8BA65FE43A07}" srcOrd="5" destOrd="0" presId="urn:microsoft.com/office/officeart/2005/8/layout/hList7"/>
+    <dgm:cxn modelId="{458FCE34-4B39-4F6F-88C6-781B9ED53C1F}" type="presParOf" srcId="{42E37581-4955-4435-B4AF-92C67A9726E2}" destId="{686903F0-434D-41EC-9241-B14E7D2CC243}" srcOrd="6" destOrd="0" presId="urn:microsoft.com/office/officeart/2005/8/layout/hList7"/>
+    <dgm:cxn modelId="{8A706B44-4E74-4133-AE92-E63723278F5C}" type="presParOf" srcId="{686903F0-434D-41EC-9241-B14E7D2CC243}" destId="{DEA6E606-5E8E-49CC-BCD9-6A09371E116D}" srcOrd="0" destOrd="0" presId="urn:microsoft.com/office/officeart/2005/8/layout/hList7"/>
+    <dgm:cxn modelId="{61E7599E-72A0-4FC9-9CC5-2F3356B8F59E}" type="presParOf" srcId="{686903F0-434D-41EC-9241-B14E7D2CC243}" destId="{2BF5255E-D7C4-4791-B227-3A74E0452D18}" srcOrd="1" destOrd="0" presId="urn:microsoft.com/office/officeart/2005/8/layout/hList7"/>
+    <dgm:cxn modelId="{6759DD28-BE34-497B-90B5-4F00CB004205}" type="presParOf" srcId="{686903F0-434D-41EC-9241-B14E7D2CC243}" destId="{02A45247-92BC-4012-BC95-BED676762B1C}" srcOrd="2" destOrd="0" presId="urn:microsoft.com/office/officeart/2005/8/layout/hList7"/>
+    <dgm:cxn modelId="{7A6EAE64-F284-4188-859C-AC8783AA371D}" type="presParOf" srcId="{686903F0-434D-41EC-9241-B14E7D2CC243}" destId="{0723FF23-6A8C-47DF-8B78-97F871779FF6}" srcOrd="3" destOrd="0" presId="urn:microsoft.com/office/officeart/2005/8/layout/hList7"/>
+    <dgm:cxn modelId="{C410FAC5-EA34-4F71-82B2-9664072689D2}" type="presParOf" srcId="{42E37581-4955-4435-B4AF-92C67A9726E2}" destId="{188AB63F-DD7D-4F6E-AB76-B508B1111421}" srcOrd="7" destOrd="0" presId="urn:microsoft.com/office/officeart/2005/8/layout/hList7"/>
+    <dgm:cxn modelId="{BF20D036-75A3-45E1-9BB3-9FAA6C650C48}" type="presParOf" srcId="{42E37581-4955-4435-B4AF-92C67A9726E2}" destId="{15F2AB94-D271-4C2F-9049-77EAEAAE5209}" srcOrd="8" destOrd="0" presId="urn:microsoft.com/office/officeart/2005/8/layout/hList7"/>
+    <dgm:cxn modelId="{CCDFE57A-551C-4062-97DC-A5D4AC1C539F}" type="presParOf" srcId="{15F2AB94-D271-4C2F-9049-77EAEAAE5209}" destId="{F15337DC-7A35-4420-9686-A6A80CCC7E9F}" srcOrd="0" destOrd="0" presId="urn:microsoft.com/office/officeart/2005/8/layout/hList7"/>
+    <dgm:cxn modelId="{996BF55D-0F84-458C-8ED2-F86D141ADD57}" type="presParOf" srcId="{15F2AB94-D271-4C2F-9049-77EAEAAE5209}" destId="{CBDDE9D8-71EF-4493-BB64-45F4252561FA}" srcOrd="1" destOrd="0" presId="urn:microsoft.com/office/officeart/2005/8/layout/hList7"/>
+    <dgm:cxn modelId="{06D0488C-6206-4315-9481-A49C3CCEBD65}" type="presParOf" srcId="{15F2AB94-D271-4C2F-9049-77EAEAAE5209}" destId="{FCA0B292-970E-4164-ABB6-DC5D46F64046}" srcOrd="2" destOrd="0" presId="urn:microsoft.com/office/officeart/2005/8/layout/hList7"/>
+    <dgm:cxn modelId="{D3650B0F-5194-441E-AA46-5E87CD67DB0A}" type="presParOf" srcId="{15F2AB94-D271-4C2F-9049-77EAEAAE5209}" destId="{8E838C5F-CF00-4FEF-BCA0-617384CBF917}" srcOrd="3" destOrd="0" presId="urn:microsoft.com/office/officeart/2005/8/layout/hList7"/>
+    <dgm:cxn modelId="{BACA4579-EEE3-415A-A3E9-F46B7388CEFD}" type="presParOf" srcId="{42E37581-4955-4435-B4AF-92C67A9726E2}" destId="{73E8CBFE-CA64-4E86-BDC8-761304174C9E}" srcOrd="9" destOrd="0" presId="urn:microsoft.com/office/officeart/2005/8/layout/hList7"/>
+    <dgm:cxn modelId="{9BB4FCFB-D20C-4C97-BBE7-EBA1A8A5ADB2}" type="presParOf" srcId="{42E37581-4955-4435-B4AF-92C67A9726E2}" destId="{A5FC7443-89AE-4015-98EF-07449E712FB6}" srcOrd="10" destOrd="0" presId="urn:microsoft.com/office/officeart/2005/8/layout/hList7"/>
+    <dgm:cxn modelId="{725CC6CA-F9BE-4629-AA0E-5707E282EEBE}" type="presParOf" srcId="{A5FC7443-89AE-4015-98EF-07449E712FB6}" destId="{82FA872A-8D83-4B88-9389-85F63E71C640}" srcOrd="0" destOrd="0" presId="urn:microsoft.com/office/officeart/2005/8/layout/hList7"/>
+    <dgm:cxn modelId="{E23875D8-6CD5-4155-A50A-21332201797E}" type="presParOf" srcId="{A5FC7443-89AE-4015-98EF-07449E712FB6}" destId="{89AE649D-6180-4740-B3F6-E6751AA6239B}" srcOrd="1" destOrd="0" presId="urn:microsoft.com/office/officeart/2005/8/layout/hList7"/>
+    <dgm:cxn modelId="{9E714CAF-AC27-4F85-AEB1-8B4C98B1660C}" type="presParOf" srcId="{A5FC7443-89AE-4015-98EF-07449E712FB6}" destId="{F1F72DD6-9E97-4C71-A37B-C002438D344F}" srcOrd="2" destOrd="0" presId="urn:microsoft.com/office/officeart/2005/8/layout/hList7"/>
+    <dgm:cxn modelId="{F18417F4-91CB-41E7-A519-ED346680BD44}" type="presParOf" srcId="{A5FC7443-89AE-4015-98EF-07449E712FB6}" destId="{5CBC1484-FCAE-4250-96F3-291C828804B8}" srcOrd="3" destOrd="0" presId="urn:microsoft.com/office/officeart/2005/8/layout/hList7"/>
+    <dgm:cxn modelId="{310634A5-80DA-4647-AA8C-AA1252A229C3}" type="presParOf" srcId="{42E37581-4955-4435-B4AF-92C67A9726E2}" destId="{E79B9467-0990-4994-84F5-B374ABDD20E8}" srcOrd="11" destOrd="0" presId="urn:microsoft.com/office/officeart/2005/8/layout/hList7"/>
+    <dgm:cxn modelId="{1776B6D4-893F-4CCB-AD2E-136869A863D5}" type="presParOf" srcId="{42E37581-4955-4435-B4AF-92C67A9726E2}" destId="{6B54F2E0-8C78-437D-8704-A122B28E0959}" srcOrd="12" destOrd="0" presId="urn:microsoft.com/office/officeart/2005/8/layout/hList7"/>
+    <dgm:cxn modelId="{6615F262-6D1B-44AA-B552-594BD6FA0FC1}" type="presParOf" srcId="{6B54F2E0-8C78-437D-8704-A122B28E0959}" destId="{27A03B1F-361E-4CAF-B1D9-CBC580B45DB5}" srcOrd="0" destOrd="0" presId="urn:microsoft.com/office/officeart/2005/8/layout/hList7"/>
+    <dgm:cxn modelId="{3F7DF4A8-4879-4834-A747-C42F7A35F65D}" type="presParOf" srcId="{6B54F2E0-8C78-437D-8704-A122B28E0959}" destId="{F7E4CDE2-BF27-4999-B760-3D844AB1AF5D}" srcOrd="1" destOrd="0" presId="urn:microsoft.com/office/officeart/2005/8/layout/hList7"/>
+    <dgm:cxn modelId="{6EEC10CD-3636-4501-AB05-8E4CC6144EEB}" type="presParOf" srcId="{6B54F2E0-8C78-437D-8704-A122B28E0959}" destId="{29D5EA60-0EBC-4704-80E6-FB9A63744A6C}" srcOrd="2" destOrd="0" presId="urn:microsoft.com/office/officeart/2005/8/layout/hList7"/>
+    <dgm:cxn modelId="{E59A9396-17E5-46FD-9048-0AB7B12D989B}" type="presParOf" srcId="{6B54F2E0-8C78-437D-8704-A122B28E0959}" destId="{C1CC7A32-6758-4471-AE91-345AA4746C85}" srcOrd="3" destOrd="0" presId="urn:microsoft.com/office/officeart/2005/8/layout/hList7"/>
+    <dgm:cxn modelId="{0359D5DF-E0BB-40B0-BB43-5CDA0DD2C33B}" type="presParOf" srcId="{42E37581-4955-4435-B4AF-92C67A9726E2}" destId="{6F6722E1-D49B-478B-88F0-F0B6BBF309A9}" srcOrd="13" destOrd="0" presId="urn:microsoft.com/office/officeart/2005/8/layout/hList7"/>
+    <dgm:cxn modelId="{637CB748-4E7B-47F4-BBD0-60AE23CEC239}" type="presParOf" srcId="{42E37581-4955-4435-B4AF-92C67A9726E2}" destId="{5E820923-E8EA-4CFA-BDF9-6885C12B182E}" srcOrd="14" destOrd="0" presId="urn:microsoft.com/office/officeart/2005/8/layout/hList7"/>
+    <dgm:cxn modelId="{33E43A14-B355-421B-8A41-D305E54C0157}" type="presParOf" srcId="{5E820923-E8EA-4CFA-BDF9-6885C12B182E}" destId="{B2BABDCC-AE96-4358-939B-E6C2C1880590}" srcOrd="0" destOrd="0" presId="urn:microsoft.com/office/officeart/2005/8/layout/hList7"/>
+    <dgm:cxn modelId="{29A59E1B-59B7-4727-ACB6-4A4A39AD26B1}" type="presParOf" srcId="{5E820923-E8EA-4CFA-BDF9-6885C12B182E}" destId="{BB97FA89-252A-4B01-9518-4E9C2732D467}" srcOrd="1" destOrd="0" presId="urn:microsoft.com/office/officeart/2005/8/layout/hList7"/>
+    <dgm:cxn modelId="{00185428-7986-4D96-B867-20F262847920}" type="presParOf" srcId="{5E820923-E8EA-4CFA-BDF9-6885C12B182E}" destId="{49D4E6F1-74D0-4F44-82FA-0704942619A8}" srcOrd="2" destOrd="0" presId="urn:microsoft.com/office/officeart/2005/8/layout/hList7"/>
+    <dgm:cxn modelId="{45222868-AAF6-4111-BF58-AD491752F2AA}" type="presParOf" srcId="{5E820923-E8EA-4CFA-BDF9-6885C12B182E}" destId="{F6FBB88D-73B9-4281-8920-27D4E68263B6}" srcOrd="3" destOrd="0" presId="urn:microsoft.com/office/officeart/2005/8/layout/hList7"/>
+  </dgm:cxnLst>
+  <dgm:bg/>
+  <dgm:whole/>
+  <dgm:extLst>
+    <a:ext uri="http://schemas.microsoft.com/office/drawing/2008/diagram">
+      <dsp:dataModelExt xmlns:dsp="http://schemas.microsoft.com/office/drawing/2008/diagram" relId="rId6" minVer="http://schemas.openxmlformats.org/drawingml/2006/diagram"/>
+    </a:ext>
+  </dgm:extLst>
+</dgm:dataModel>
+</file>
+
+<file path=ppt/diagrams/drawing1.xml><?xml version="1.0" encoding="utf-8"?>
+<dsp:drawing xmlns:dgm="http://schemas.openxmlformats.org/drawingml/2006/diagram" xmlns:dsp="http://schemas.microsoft.com/office/drawing/2008/diagram" xmlns:a="http://schemas.openxmlformats.org/drawingml/2006/main">
+  <dsp:spTree>
+    <dsp:nvGrpSpPr>
+      <dsp:cNvPr id="0" name=""/>
+      <dsp:cNvGrpSpPr/>
+    </dsp:nvGrpSpPr>
+    <dsp:grpSpPr/>
+    <dsp:sp modelId="{0CC94FEC-590C-448B-8EF7-2E1525147672}">
+      <dsp:nvSpPr>
+        <dsp:cNvPr id="0" name=""/>
+        <dsp:cNvSpPr/>
+      </dsp:nvSpPr>
+      <dsp:spPr>
+        <a:xfrm>
+          <a:off x="2152" y="0"/>
+          <a:ext cx="1394486" cy="4460032"/>
+        </a:xfrm>
+        <a:prstGeom prst="roundRect">
+          <a:avLst>
+            <a:gd name="adj" fmla="val 10000"/>
+          </a:avLst>
+        </a:prstGeom>
+        <a:solidFill>
+          <a:schemeClr val="accent1">
+            <a:hueOff val="0"/>
+            <a:satOff val="0"/>
+            <a:lumOff val="0"/>
+            <a:alphaOff val="0"/>
+          </a:schemeClr>
+        </a:solidFill>
+        <a:ln w="12700" cap="flat" cmpd="sng" algn="ctr">
+          <a:solidFill>
+            <a:schemeClr val="lt1">
+              <a:hueOff val="0"/>
+              <a:satOff val="0"/>
+              <a:lumOff val="0"/>
+              <a:alphaOff val="0"/>
+            </a:schemeClr>
+          </a:solidFill>
+          <a:prstDash val="solid"/>
+          <a:miter lim="800000"/>
+        </a:ln>
+        <a:effectLst/>
+      </dsp:spPr>
+      <dsp:style>
+        <a:lnRef idx="2">
+          <a:scrgbClr r="0" g="0" b="0"/>
+        </a:lnRef>
+        <a:fillRef idx="1">
+          <a:scrgbClr r="0" g="0" b="0"/>
+        </a:fillRef>
+        <a:effectRef idx="0">
+          <a:scrgbClr r="0" g="0" b="0"/>
+        </a:effectRef>
+        <a:fontRef idx="minor">
+          <a:schemeClr val="lt1"/>
+        </a:fontRef>
+      </dsp:style>
+      <dsp:txBody>
+        <a:bodyPr spcFirstLastPara="0" vert="horz" wrap="square" lIns="85344" tIns="85344" rIns="85344" bIns="85344" numCol="1" spcCol="1270" anchor="ctr" anchorCtr="0">
+          <a:noAutofit/>
+        </a:bodyPr>
+        <a:lstStyle/>
+        <a:p>
+          <a:pPr marL="0" lvl="0" indent="0" algn="ctr" defTabSz="533400">
+            <a:lnSpc>
+              <a:spcPct val="90000"/>
+            </a:lnSpc>
+            <a:spcBef>
+              <a:spcPct val="0"/>
+            </a:spcBef>
+            <a:spcAft>
+              <a:spcPct val="35000"/>
+            </a:spcAft>
+            <a:buNone/>
+          </a:pPr>
+          <a:r>
+            <a:rPr lang="en-IN" sz="1200" b="0" i="0" kern="1200" dirty="0">
+              <a:latin typeface="Arial" panose="020B0604020202020204" pitchFamily="34" charset="0"/>
+              <a:cs typeface="Arial" panose="020B0604020202020204" pitchFamily="34" charset="0"/>
+            </a:rPr>
+            <a:t>Identifying the Business Need</a:t>
+          </a:r>
+          <a:endParaRPr lang="en-IN" sz="1200" kern="1200" dirty="0">
+            <a:latin typeface="Arial" panose="020B0604020202020204" pitchFamily="34" charset="0"/>
+            <a:cs typeface="Arial" panose="020B0604020202020204" pitchFamily="34" charset="0"/>
+          </a:endParaRPr>
+        </a:p>
+      </dsp:txBody>
+      <dsp:txXfrm>
+        <a:off x="2152" y="1784012"/>
+        <a:ext cx="1394486" cy="1784012"/>
+      </dsp:txXfrm>
+    </dsp:sp>
+    <dsp:sp modelId="{88373956-F9F3-4D52-BDBD-99E2DF54D0FB}">
+      <dsp:nvSpPr>
+        <dsp:cNvPr id="0" name=""/>
+        <dsp:cNvSpPr/>
+      </dsp:nvSpPr>
+      <dsp:spPr>
+        <a:xfrm>
+          <a:off x="43987" y="267601"/>
+          <a:ext cx="1310816" cy="1485190"/>
+        </a:xfrm>
+        <a:prstGeom prst="ellipse">
+          <a:avLst/>
+        </a:prstGeom>
+        <a:blipFill>
+          <a:blip xmlns:r="http://schemas.openxmlformats.org/officeDocument/2006/relationships" r:embed="rId1"/>
+          <a:srcRect/>
+          <a:stretch>
+            <a:fillRect l="-75000" r="-75000"/>
+          </a:stretch>
+        </a:blipFill>
+        <a:ln w="12700" cap="flat" cmpd="sng" algn="ctr">
+          <a:solidFill>
+            <a:schemeClr val="lt1">
+              <a:hueOff val="0"/>
+              <a:satOff val="0"/>
+              <a:lumOff val="0"/>
+              <a:alphaOff val="0"/>
+            </a:schemeClr>
+          </a:solidFill>
+          <a:prstDash val="solid"/>
+          <a:miter lim="800000"/>
+        </a:ln>
+        <a:effectLst/>
+      </dsp:spPr>
+      <dsp:style>
+        <a:lnRef idx="2">
+          <a:scrgbClr r="0" g="0" b="0"/>
+        </a:lnRef>
+        <a:fillRef idx="1">
+          <a:scrgbClr r="0" g="0" b="0"/>
+        </a:fillRef>
+        <a:effectRef idx="0">
+          <a:scrgbClr r="0" g="0" b="0"/>
+        </a:effectRef>
+        <a:fontRef idx="minor"/>
+      </dsp:style>
+    </dsp:sp>
+    <dsp:sp modelId="{C7AD48CA-5ABF-4650-9E4C-9860C11F033A}">
+      <dsp:nvSpPr>
+        <dsp:cNvPr id="0" name=""/>
+        <dsp:cNvSpPr/>
+      </dsp:nvSpPr>
+      <dsp:spPr>
+        <a:xfrm>
+          <a:off x="1438473" y="0"/>
+          <a:ext cx="1394486" cy="4460032"/>
+        </a:xfrm>
+        <a:prstGeom prst="roundRect">
+          <a:avLst>
+            <a:gd name="adj" fmla="val 10000"/>
+          </a:avLst>
+        </a:prstGeom>
+        <a:solidFill>
+          <a:schemeClr val="accent1">
+            <a:hueOff val="0"/>
+            <a:satOff val="0"/>
+            <a:lumOff val="0"/>
+            <a:alphaOff val="0"/>
+          </a:schemeClr>
+        </a:solidFill>
+        <a:ln w="12700" cap="flat" cmpd="sng" algn="ctr">
+          <a:solidFill>
+            <a:schemeClr val="lt1">
+              <a:hueOff val="0"/>
+              <a:satOff val="0"/>
+              <a:lumOff val="0"/>
+              <a:alphaOff val="0"/>
+            </a:schemeClr>
+          </a:solidFill>
+          <a:prstDash val="solid"/>
+          <a:miter lim="800000"/>
+        </a:ln>
+        <a:effectLst/>
+      </dsp:spPr>
+      <dsp:style>
+        <a:lnRef idx="2">
+          <a:scrgbClr r="0" g="0" b="0"/>
+        </a:lnRef>
+        <a:fillRef idx="1">
+          <a:scrgbClr r="0" g="0" b="0"/>
+        </a:fillRef>
+        <a:effectRef idx="0">
+          <a:scrgbClr r="0" g="0" b="0"/>
+        </a:effectRef>
+        <a:fontRef idx="minor">
+          <a:schemeClr val="lt1"/>
+        </a:fontRef>
+      </dsp:style>
+      <dsp:txBody>
+        <a:bodyPr spcFirstLastPara="0" vert="horz" wrap="square" lIns="85344" tIns="85344" rIns="85344" bIns="85344" numCol="1" spcCol="1270" anchor="ctr" anchorCtr="0">
+          <a:noAutofit/>
+        </a:bodyPr>
+        <a:lstStyle/>
+        <a:p>
+          <a:pPr marL="0" lvl="0" indent="0" algn="ctr" defTabSz="533400">
+            <a:lnSpc>
+              <a:spcPct val="90000"/>
+            </a:lnSpc>
+            <a:spcBef>
+              <a:spcPct val="0"/>
+            </a:spcBef>
+            <a:spcAft>
+              <a:spcPct val="35000"/>
+            </a:spcAft>
+            <a:buNone/>
+          </a:pPr>
+          <a:r>
+            <a:rPr lang="en-IN" sz="1200" kern="1200" dirty="0">
+              <a:latin typeface="Arial" panose="020B0604020202020204" pitchFamily="34" charset="0"/>
+              <a:cs typeface="Arial" panose="020B0604020202020204" pitchFamily="34" charset="0"/>
+            </a:rPr>
+            <a:t>Using the Smart Meter data for Data Source</a:t>
+          </a:r>
+        </a:p>
+      </dsp:txBody>
+      <dsp:txXfrm>
+        <a:off x="1438473" y="1784012"/>
+        <a:ext cx="1394486" cy="1784012"/>
+      </dsp:txXfrm>
+    </dsp:sp>
+    <dsp:sp modelId="{E79AC540-C4E1-487D-A7ED-FCF4A22871EC}">
+      <dsp:nvSpPr>
+        <dsp:cNvPr id="0" name=""/>
+        <dsp:cNvSpPr/>
+      </dsp:nvSpPr>
+      <dsp:spPr>
+        <a:xfrm>
+          <a:off x="1480308" y="267601"/>
+          <a:ext cx="1310816" cy="1485190"/>
+        </a:xfrm>
+        <a:prstGeom prst="ellipse">
+          <a:avLst/>
+        </a:prstGeom>
+        <a:blipFill>
+          <a:blip xmlns:r="http://schemas.openxmlformats.org/officeDocument/2006/relationships" r:embed="rId2"/>
+          <a:srcRect/>
+          <a:stretch>
+            <a:fillRect l="-33000" r="-33000"/>
+          </a:stretch>
+        </a:blipFill>
+        <a:ln w="12700" cap="flat" cmpd="sng" algn="ctr">
+          <a:solidFill>
+            <a:schemeClr val="lt1">
+              <a:hueOff val="0"/>
+              <a:satOff val="0"/>
+              <a:lumOff val="0"/>
+              <a:alphaOff val="0"/>
+            </a:schemeClr>
+          </a:solidFill>
+          <a:prstDash val="solid"/>
+          <a:miter lim="800000"/>
+        </a:ln>
+        <a:effectLst/>
+      </dsp:spPr>
+      <dsp:style>
+        <a:lnRef idx="2">
+          <a:scrgbClr r="0" g="0" b="0"/>
+        </a:lnRef>
+        <a:fillRef idx="1">
+          <a:scrgbClr r="0" g="0" b="0"/>
+        </a:fillRef>
+        <a:effectRef idx="0">
+          <a:scrgbClr r="0" g="0" b="0"/>
+        </a:effectRef>
+        <a:fontRef idx="minor"/>
+      </dsp:style>
+    </dsp:sp>
+    <dsp:sp modelId="{1C8ABF4C-7AAE-4357-B629-6BE542B9FF94}">
+      <dsp:nvSpPr>
+        <dsp:cNvPr id="0" name=""/>
+        <dsp:cNvSpPr/>
+      </dsp:nvSpPr>
+      <dsp:spPr>
+        <a:xfrm>
+          <a:off x="2874794" y="0"/>
+          <a:ext cx="1394486" cy="4460032"/>
+        </a:xfrm>
+        <a:prstGeom prst="roundRect">
+          <a:avLst>
+            <a:gd name="adj" fmla="val 10000"/>
+          </a:avLst>
+        </a:prstGeom>
+        <a:solidFill>
+          <a:schemeClr val="accent1">
+            <a:hueOff val="0"/>
+            <a:satOff val="0"/>
+            <a:lumOff val="0"/>
+            <a:alphaOff val="0"/>
+          </a:schemeClr>
+        </a:solidFill>
+        <a:ln w="12700" cap="flat" cmpd="sng" algn="ctr">
+          <a:solidFill>
+            <a:schemeClr val="lt1">
+              <a:hueOff val="0"/>
+              <a:satOff val="0"/>
+              <a:lumOff val="0"/>
+              <a:alphaOff val="0"/>
+            </a:schemeClr>
+          </a:solidFill>
+          <a:prstDash val="solid"/>
+          <a:miter lim="800000"/>
+        </a:ln>
+        <a:effectLst/>
+      </dsp:spPr>
+      <dsp:style>
+        <a:lnRef idx="2">
+          <a:scrgbClr r="0" g="0" b="0"/>
+        </a:lnRef>
+        <a:fillRef idx="1">
+          <a:scrgbClr r="0" g="0" b="0"/>
+        </a:fillRef>
+        <a:effectRef idx="0">
+          <a:scrgbClr r="0" g="0" b="0"/>
+        </a:effectRef>
+        <a:fontRef idx="minor">
+          <a:schemeClr val="lt1"/>
+        </a:fontRef>
+      </dsp:style>
+      <dsp:txBody>
+        <a:bodyPr spcFirstLastPara="0" vert="horz" wrap="square" lIns="85344" tIns="85344" rIns="85344" bIns="85344" numCol="1" spcCol="1270" anchor="ctr" anchorCtr="0">
+          <a:noAutofit/>
+        </a:bodyPr>
+        <a:lstStyle/>
+        <a:p>
+          <a:pPr marL="0" lvl="0" indent="0" algn="ctr" defTabSz="533400">
+            <a:lnSpc>
+              <a:spcPct val="90000"/>
+            </a:lnSpc>
+            <a:spcBef>
+              <a:spcPct val="0"/>
+            </a:spcBef>
+            <a:spcAft>
+              <a:spcPct val="35000"/>
+            </a:spcAft>
+            <a:buNone/>
+          </a:pPr>
+          <a:r>
+            <a:rPr lang="en-IN" sz="1200" kern="1200">
+              <a:latin typeface="Arial" panose="020B0604020202020204" pitchFamily="34" charset="0"/>
+              <a:cs typeface="Arial" panose="020B0604020202020204" pitchFamily="34" charset="0"/>
+            </a:rPr>
+            <a:t>Data Processing</a:t>
+          </a:r>
+          <a:endParaRPr lang="en-IN" sz="1200" kern="1200" dirty="0">
+            <a:latin typeface="Arial" panose="020B0604020202020204" pitchFamily="34" charset="0"/>
+            <a:cs typeface="Arial" panose="020B0604020202020204" pitchFamily="34" charset="0"/>
+          </a:endParaRPr>
+        </a:p>
+      </dsp:txBody>
+      <dsp:txXfrm>
+        <a:off x="2874794" y="1784012"/>
+        <a:ext cx="1394486" cy="1784012"/>
+      </dsp:txXfrm>
+    </dsp:sp>
+    <dsp:sp modelId="{0AFBA350-FFB5-4945-9327-61F504F4D162}">
+      <dsp:nvSpPr>
+        <dsp:cNvPr id="0" name=""/>
+        <dsp:cNvSpPr/>
+      </dsp:nvSpPr>
+      <dsp:spPr>
+        <a:xfrm>
+          <a:off x="3041464" y="533710"/>
+          <a:ext cx="1061145" cy="952972"/>
+        </a:xfrm>
+        <a:prstGeom prst="ellipse">
+          <a:avLst/>
+        </a:prstGeom>
+        <a:blipFill>
+          <a:blip xmlns:r="http://schemas.openxmlformats.org/officeDocument/2006/relationships" r:embed="rId3"/>
+          <a:srcRect/>
+          <a:stretch>
+            <a:fillRect l="-80000" r="-80000"/>
+          </a:stretch>
+        </a:blipFill>
+        <a:ln w="12700" cap="flat" cmpd="sng" algn="ctr">
+          <a:solidFill>
+            <a:schemeClr val="lt1">
+              <a:hueOff val="0"/>
+              <a:satOff val="0"/>
+              <a:lumOff val="0"/>
+              <a:alphaOff val="0"/>
+            </a:schemeClr>
+          </a:solidFill>
+          <a:prstDash val="solid"/>
+          <a:miter lim="800000"/>
+        </a:ln>
+        <a:effectLst/>
+      </dsp:spPr>
+      <dsp:style>
+        <a:lnRef idx="2">
+          <a:scrgbClr r="0" g="0" b="0"/>
+        </a:lnRef>
+        <a:fillRef idx="1">
+          <a:scrgbClr r="0" g="0" b="0"/>
+        </a:fillRef>
+        <a:effectRef idx="0">
+          <a:scrgbClr r="0" g="0" b="0"/>
+        </a:effectRef>
+        <a:fontRef idx="minor"/>
+      </dsp:style>
+    </dsp:sp>
+    <dsp:sp modelId="{DEA6E606-5E8E-49CC-BCD9-6A09371E116D}">
+      <dsp:nvSpPr>
+        <dsp:cNvPr id="0" name=""/>
+        <dsp:cNvSpPr/>
+      </dsp:nvSpPr>
+      <dsp:spPr>
+        <a:xfrm>
+          <a:off x="4311114" y="0"/>
+          <a:ext cx="1627435" cy="4460032"/>
+        </a:xfrm>
+        <a:prstGeom prst="roundRect">
+          <a:avLst>
+            <a:gd name="adj" fmla="val 10000"/>
+          </a:avLst>
+        </a:prstGeom>
+        <a:solidFill>
+          <a:schemeClr val="accent1">
+            <a:hueOff val="0"/>
+            <a:satOff val="0"/>
+            <a:lumOff val="0"/>
+            <a:alphaOff val="0"/>
+          </a:schemeClr>
+        </a:solidFill>
+        <a:ln w="12700" cap="flat" cmpd="sng" algn="ctr">
+          <a:solidFill>
+            <a:schemeClr val="lt1">
+              <a:hueOff val="0"/>
+              <a:satOff val="0"/>
+              <a:lumOff val="0"/>
+              <a:alphaOff val="0"/>
+            </a:schemeClr>
+          </a:solidFill>
+          <a:prstDash val="solid"/>
+          <a:miter lim="800000"/>
+        </a:ln>
+        <a:effectLst/>
+      </dsp:spPr>
+      <dsp:style>
+        <a:lnRef idx="2">
+          <a:scrgbClr r="0" g="0" b="0"/>
+        </a:lnRef>
+        <a:fillRef idx="1">
+          <a:scrgbClr r="0" g="0" b="0"/>
+        </a:fillRef>
+        <a:effectRef idx="0">
+          <a:scrgbClr r="0" g="0" b="0"/>
+        </a:effectRef>
+        <a:fontRef idx="minor">
+          <a:schemeClr val="lt1"/>
+        </a:fontRef>
+      </dsp:style>
+      <dsp:txBody>
+        <a:bodyPr spcFirstLastPara="0" vert="horz" wrap="square" lIns="85344" tIns="85344" rIns="85344" bIns="85344" numCol="1" spcCol="1270" anchor="ctr" anchorCtr="0">
+          <a:noAutofit/>
+        </a:bodyPr>
+        <a:lstStyle/>
+        <a:p>
+          <a:pPr marL="0" lvl="0" indent="0" algn="ctr" defTabSz="533400">
+            <a:lnSpc>
+              <a:spcPct val="90000"/>
+            </a:lnSpc>
+            <a:spcBef>
+              <a:spcPct val="0"/>
+            </a:spcBef>
+            <a:spcAft>
+              <a:spcPct val="35000"/>
+            </a:spcAft>
+            <a:buNone/>
+          </a:pPr>
+          <a:r>
+            <a:rPr lang="en-IN" sz="1200" kern="1200" dirty="0">
+              <a:latin typeface="Arial" panose="020B0604020202020204" pitchFamily="34" charset="0"/>
+              <a:cs typeface="Arial" panose="020B0604020202020204" pitchFamily="34" charset="0"/>
+            </a:rPr>
+            <a:t>LSTM Model Architecture and </a:t>
+          </a:r>
+          <a:r>
+            <a:rPr lang="en-IN" sz="1200" kern="1200">
+              <a:latin typeface="Arial" panose="020B0604020202020204" pitchFamily="34" charset="0"/>
+              <a:cs typeface="Arial" panose="020B0604020202020204" pitchFamily="34" charset="0"/>
+            </a:rPr>
+            <a:t>Model Training</a:t>
+          </a:r>
+          <a:endParaRPr lang="en-IN" sz="1200" kern="1200" dirty="0">
+            <a:latin typeface="Arial" panose="020B0604020202020204" pitchFamily="34" charset="0"/>
+            <a:cs typeface="Arial" panose="020B0604020202020204" pitchFamily="34" charset="0"/>
+          </a:endParaRPr>
+        </a:p>
+      </dsp:txBody>
+      <dsp:txXfrm>
+        <a:off x="4311114" y="1784012"/>
+        <a:ext cx="1627435" cy="1784012"/>
+      </dsp:txXfrm>
+    </dsp:sp>
+    <dsp:sp modelId="{0723FF23-6A8C-47DF-8B78-97F871779FF6}">
+      <dsp:nvSpPr>
+        <dsp:cNvPr id="0" name=""/>
+        <dsp:cNvSpPr/>
+      </dsp:nvSpPr>
+      <dsp:spPr>
+        <a:xfrm>
+          <a:off x="4566811" y="400177"/>
+          <a:ext cx="1116042" cy="1220039"/>
+        </a:xfrm>
+        <a:prstGeom prst="ellipse">
+          <a:avLst/>
+        </a:prstGeom>
+        <a:blipFill>
+          <a:blip xmlns:r="http://schemas.openxmlformats.org/officeDocument/2006/relationships" r:embed="rId4"/>
+          <a:srcRect/>
+          <a:stretch>
+            <a:fillRect l="-114000" r="-114000"/>
+          </a:stretch>
+        </a:blipFill>
+        <a:ln w="12700" cap="flat" cmpd="sng" algn="ctr">
+          <a:solidFill>
+            <a:schemeClr val="lt1">
+              <a:hueOff val="0"/>
+              <a:satOff val="0"/>
+              <a:lumOff val="0"/>
+              <a:alphaOff val="0"/>
+            </a:schemeClr>
+          </a:solidFill>
+          <a:prstDash val="solid"/>
+          <a:miter lim="800000"/>
+        </a:ln>
+        <a:effectLst/>
+      </dsp:spPr>
+      <dsp:style>
+        <a:lnRef idx="2">
+          <a:scrgbClr r="0" g="0" b="0"/>
+        </a:lnRef>
+        <a:fillRef idx="1">
+          <a:scrgbClr r="0" g="0" b="0"/>
+        </a:fillRef>
+        <a:effectRef idx="0">
+          <a:scrgbClr r="0" g="0" b="0"/>
+        </a:effectRef>
+        <a:fontRef idx="minor"/>
+      </dsp:style>
+    </dsp:sp>
+    <dsp:sp modelId="{F15337DC-7A35-4420-9686-A6A80CCC7E9F}">
+      <dsp:nvSpPr>
+        <dsp:cNvPr id="0" name=""/>
+        <dsp:cNvSpPr/>
+      </dsp:nvSpPr>
+      <dsp:spPr>
+        <a:xfrm>
+          <a:off x="5980384" y="0"/>
+          <a:ext cx="1394486" cy="4460032"/>
+        </a:xfrm>
+        <a:prstGeom prst="roundRect">
+          <a:avLst>
+            <a:gd name="adj" fmla="val 10000"/>
+          </a:avLst>
+        </a:prstGeom>
+        <a:solidFill>
+          <a:schemeClr val="accent1">
+            <a:hueOff val="0"/>
+            <a:satOff val="0"/>
+            <a:lumOff val="0"/>
+            <a:alphaOff val="0"/>
+          </a:schemeClr>
+        </a:solidFill>
+        <a:ln w="12700" cap="flat" cmpd="sng" algn="ctr">
+          <a:solidFill>
+            <a:schemeClr val="lt1">
+              <a:hueOff val="0"/>
+              <a:satOff val="0"/>
+              <a:lumOff val="0"/>
+              <a:alphaOff val="0"/>
+            </a:schemeClr>
+          </a:solidFill>
+          <a:prstDash val="solid"/>
+          <a:miter lim="800000"/>
+        </a:ln>
+        <a:effectLst/>
+      </dsp:spPr>
+      <dsp:style>
+        <a:lnRef idx="2">
+          <a:scrgbClr r="0" g="0" b="0"/>
+        </a:lnRef>
+        <a:fillRef idx="1">
+          <a:scrgbClr r="0" g="0" b="0"/>
+        </a:fillRef>
+        <a:effectRef idx="0">
+          <a:scrgbClr r="0" g="0" b="0"/>
+        </a:effectRef>
+        <a:fontRef idx="minor">
+          <a:schemeClr val="lt1"/>
+        </a:fontRef>
+      </dsp:style>
+      <dsp:txBody>
+        <a:bodyPr spcFirstLastPara="0" vert="horz" wrap="square" lIns="85344" tIns="85344" rIns="85344" bIns="85344" numCol="1" spcCol="1270" anchor="ctr" anchorCtr="0">
+          <a:noAutofit/>
+        </a:bodyPr>
+        <a:lstStyle/>
+        <a:p>
+          <a:pPr marL="0" lvl="0" indent="0" algn="ctr" defTabSz="533400">
+            <a:lnSpc>
+              <a:spcPct val="90000"/>
+            </a:lnSpc>
+            <a:spcBef>
+              <a:spcPct val="0"/>
+            </a:spcBef>
+            <a:spcAft>
+              <a:spcPct val="35000"/>
+            </a:spcAft>
+            <a:buNone/>
+          </a:pPr>
+          <a:r>
+            <a:rPr lang="en-IN" sz="1200" kern="1200" dirty="0">
+              <a:latin typeface="Arial" panose="020B0604020202020204" pitchFamily="34" charset="0"/>
+              <a:cs typeface="Arial" panose="020B0604020202020204" pitchFamily="34" charset="0"/>
+            </a:rPr>
+            <a:t>Prediction and Inverse Scaling and </a:t>
+          </a:r>
+          <a:r>
+            <a:rPr lang="en-IN" sz="1200" kern="1200">
+              <a:latin typeface="Arial" panose="020B0604020202020204" pitchFamily="34" charset="0"/>
+              <a:cs typeface="Arial" panose="020B0604020202020204" pitchFamily="34" charset="0"/>
+            </a:rPr>
+            <a:t>Model Evaluation</a:t>
+          </a:r>
+          <a:endParaRPr lang="en-IN" sz="1200" kern="1200" dirty="0">
+            <a:latin typeface="Arial" panose="020B0604020202020204" pitchFamily="34" charset="0"/>
+            <a:cs typeface="Arial" panose="020B0604020202020204" pitchFamily="34" charset="0"/>
+          </a:endParaRPr>
+        </a:p>
+      </dsp:txBody>
+      <dsp:txXfrm>
+        <a:off x="5980384" y="1784012"/>
+        <a:ext cx="1394486" cy="1784012"/>
+      </dsp:txXfrm>
+    </dsp:sp>
+    <dsp:sp modelId="{8E838C5F-CF00-4FEF-BCA0-617384CBF917}">
+      <dsp:nvSpPr>
+        <dsp:cNvPr id="0" name=""/>
+        <dsp:cNvSpPr/>
+      </dsp:nvSpPr>
+      <dsp:spPr>
+        <a:xfrm>
+          <a:off x="6022219" y="267601"/>
+          <a:ext cx="1310816" cy="1485190"/>
+        </a:xfrm>
+        <a:prstGeom prst="ellipse">
+          <a:avLst/>
+        </a:prstGeom>
+        <a:blipFill>
+          <a:blip xmlns:r="http://schemas.openxmlformats.org/officeDocument/2006/relationships" r:embed="rId5"/>
+          <a:srcRect/>
+          <a:stretch>
+            <a:fillRect l="-56000" r="-56000"/>
+          </a:stretch>
+        </a:blipFill>
+        <a:ln w="12700" cap="flat" cmpd="sng" algn="ctr">
+          <a:solidFill>
+            <a:schemeClr val="lt1">
+              <a:hueOff val="0"/>
+              <a:satOff val="0"/>
+              <a:lumOff val="0"/>
+              <a:alphaOff val="0"/>
+            </a:schemeClr>
+          </a:solidFill>
+          <a:prstDash val="solid"/>
+          <a:miter lim="800000"/>
+        </a:ln>
+        <a:effectLst/>
+      </dsp:spPr>
+      <dsp:style>
+        <a:lnRef idx="2">
+          <a:scrgbClr r="0" g="0" b="0"/>
+        </a:lnRef>
+        <a:fillRef idx="1">
+          <a:scrgbClr r="0" g="0" b="0"/>
+        </a:fillRef>
+        <a:effectRef idx="0">
+          <a:scrgbClr r="0" g="0" b="0"/>
+        </a:effectRef>
+        <a:fontRef idx="minor"/>
+      </dsp:style>
+    </dsp:sp>
+    <dsp:sp modelId="{82FA872A-8D83-4B88-9389-85F63E71C640}">
+      <dsp:nvSpPr>
+        <dsp:cNvPr id="0" name=""/>
+        <dsp:cNvSpPr/>
+      </dsp:nvSpPr>
+      <dsp:spPr>
+        <a:xfrm>
+          <a:off x="7416705" y="0"/>
+          <a:ext cx="1657904" cy="4460032"/>
+        </a:xfrm>
+        <a:prstGeom prst="roundRect">
+          <a:avLst>
+            <a:gd name="adj" fmla="val 10000"/>
+          </a:avLst>
+        </a:prstGeom>
+        <a:solidFill>
+          <a:schemeClr val="accent1">
+            <a:hueOff val="0"/>
+            <a:satOff val="0"/>
+            <a:lumOff val="0"/>
+            <a:alphaOff val="0"/>
+          </a:schemeClr>
+        </a:solidFill>
+        <a:ln w="12700" cap="flat" cmpd="sng" algn="ctr">
+          <a:solidFill>
+            <a:schemeClr val="lt1">
+              <a:hueOff val="0"/>
+              <a:satOff val="0"/>
+              <a:lumOff val="0"/>
+              <a:alphaOff val="0"/>
+            </a:schemeClr>
+          </a:solidFill>
+          <a:prstDash val="solid"/>
+          <a:miter lim="800000"/>
+        </a:ln>
+        <a:effectLst/>
+      </dsp:spPr>
+      <dsp:style>
+        <a:lnRef idx="2">
+          <a:scrgbClr r="0" g="0" b="0"/>
+        </a:lnRef>
+        <a:fillRef idx="1">
+          <a:scrgbClr r="0" g="0" b="0"/>
+        </a:fillRef>
+        <a:effectRef idx="0">
+          <a:scrgbClr r="0" g="0" b="0"/>
+        </a:effectRef>
+        <a:fontRef idx="minor">
+          <a:schemeClr val="lt1"/>
+        </a:fontRef>
+      </dsp:style>
+      <dsp:txBody>
+        <a:bodyPr spcFirstLastPara="0" vert="horz" wrap="square" lIns="85344" tIns="85344" rIns="85344" bIns="85344" numCol="1" spcCol="1270" anchor="ctr" anchorCtr="0">
+          <a:noAutofit/>
+        </a:bodyPr>
+        <a:lstStyle/>
+        <a:p>
+          <a:pPr marL="0" lvl="0" indent="0" algn="ctr" defTabSz="533400">
+            <a:lnSpc>
+              <a:spcPct val="90000"/>
+            </a:lnSpc>
+            <a:spcBef>
+              <a:spcPct val="0"/>
+            </a:spcBef>
+            <a:spcAft>
+              <a:spcPct val="35000"/>
+            </a:spcAft>
+            <a:buNone/>
+          </a:pPr>
+          <a:r>
+            <a:rPr lang="en-IN" sz="1200" kern="1200" dirty="0">
+              <a:latin typeface="Arial" panose="020B0604020202020204" pitchFamily="34" charset="0"/>
+              <a:cs typeface="Arial" panose="020B0604020202020204" pitchFamily="34" charset="0"/>
+            </a:rPr>
+            <a:t>Result Visualization</a:t>
+          </a:r>
+        </a:p>
+      </dsp:txBody>
+      <dsp:txXfrm>
+        <a:off x="7416705" y="1784012"/>
+        <a:ext cx="1657904" cy="1784012"/>
+      </dsp:txXfrm>
+    </dsp:sp>
+    <dsp:sp modelId="{5CBC1484-FCAE-4250-96F3-291C828804B8}">
+      <dsp:nvSpPr>
+        <dsp:cNvPr id="0" name=""/>
+        <dsp:cNvSpPr/>
+      </dsp:nvSpPr>
+      <dsp:spPr>
+        <a:xfrm>
+          <a:off x="7590249" y="267601"/>
+          <a:ext cx="1310816" cy="1485190"/>
+        </a:xfrm>
+        <a:prstGeom prst="ellipse">
+          <a:avLst/>
+        </a:prstGeom>
+        <a:blipFill>
+          <a:blip xmlns:r="http://schemas.openxmlformats.org/officeDocument/2006/relationships" r:embed="rId6"/>
+          <a:srcRect/>
+          <a:stretch>
+            <a:fillRect l="-17000" r="-17000"/>
+          </a:stretch>
+        </a:blipFill>
+        <a:ln w="12700" cap="flat" cmpd="sng" algn="ctr">
+          <a:solidFill>
+            <a:schemeClr val="lt1">
+              <a:hueOff val="0"/>
+              <a:satOff val="0"/>
+              <a:lumOff val="0"/>
+              <a:alphaOff val="0"/>
+            </a:schemeClr>
+          </a:solidFill>
+          <a:prstDash val="solid"/>
+          <a:miter lim="800000"/>
+        </a:ln>
+        <a:effectLst/>
+      </dsp:spPr>
+      <dsp:style>
+        <a:lnRef idx="2">
+          <a:scrgbClr r="0" g="0" b="0"/>
+        </a:lnRef>
+        <a:fillRef idx="1">
+          <a:scrgbClr r="0" g="0" b="0"/>
+        </a:fillRef>
+        <a:effectRef idx="0">
+          <a:scrgbClr r="0" g="0" b="0"/>
+        </a:effectRef>
+        <a:fontRef idx="minor"/>
+      </dsp:style>
+    </dsp:sp>
+    <dsp:sp modelId="{27A03B1F-361E-4CAF-B1D9-CBC580B45DB5}">
+      <dsp:nvSpPr>
+        <dsp:cNvPr id="0" name=""/>
+        <dsp:cNvSpPr/>
+      </dsp:nvSpPr>
+      <dsp:spPr>
+        <a:xfrm>
+          <a:off x="9116444" y="0"/>
+          <a:ext cx="1394486" cy="4460032"/>
+        </a:xfrm>
+        <a:prstGeom prst="roundRect">
+          <a:avLst>
+            <a:gd name="adj" fmla="val 10000"/>
+          </a:avLst>
+        </a:prstGeom>
+        <a:solidFill>
+          <a:schemeClr val="accent1">
+            <a:hueOff val="0"/>
+            <a:satOff val="0"/>
+            <a:lumOff val="0"/>
+            <a:alphaOff val="0"/>
+          </a:schemeClr>
+        </a:solidFill>
+        <a:ln w="12700" cap="flat" cmpd="sng" algn="ctr">
+          <a:solidFill>
+            <a:schemeClr val="lt1">
+              <a:hueOff val="0"/>
+              <a:satOff val="0"/>
+              <a:lumOff val="0"/>
+              <a:alphaOff val="0"/>
+            </a:schemeClr>
+          </a:solidFill>
+          <a:prstDash val="solid"/>
+          <a:miter lim="800000"/>
+        </a:ln>
+        <a:effectLst/>
+      </dsp:spPr>
+      <dsp:style>
+        <a:lnRef idx="2">
+          <a:scrgbClr r="0" g="0" b="0"/>
+        </a:lnRef>
+        <a:fillRef idx="1">
+          <a:scrgbClr r="0" g="0" b="0"/>
+        </a:fillRef>
+        <a:effectRef idx="0">
+          <a:scrgbClr r="0" g="0" b="0"/>
+        </a:effectRef>
+        <a:fontRef idx="minor">
+          <a:schemeClr val="lt1"/>
+        </a:fontRef>
+      </dsp:style>
+      <dsp:txBody>
+        <a:bodyPr spcFirstLastPara="0" vert="horz" wrap="square" lIns="85344" tIns="85344" rIns="85344" bIns="85344" numCol="1" spcCol="1270" anchor="ctr" anchorCtr="0">
+          <a:noAutofit/>
+        </a:bodyPr>
+        <a:lstStyle/>
+        <a:p>
+          <a:pPr marL="0" lvl="0" indent="0" algn="ctr" defTabSz="533400">
+            <a:lnSpc>
+              <a:spcPct val="90000"/>
+            </a:lnSpc>
+            <a:spcBef>
+              <a:spcPct val="0"/>
+            </a:spcBef>
+            <a:spcAft>
+              <a:spcPct val="35000"/>
+            </a:spcAft>
+            <a:buNone/>
+          </a:pPr>
+          <a:r>
+            <a:rPr lang="en-IN" sz="1200" kern="1200" dirty="0">
+              <a:latin typeface="Arial" panose="020B0604020202020204" pitchFamily="34" charset="0"/>
+              <a:cs typeface="Arial" panose="020B0604020202020204" pitchFamily="34" charset="0"/>
+            </a:rPr>
+            <a:t>Business Insights</a:t>
+          </a:r>
+        </a:p>
+      </dsp:txBody>
+      <dsp:txXfrm>
+        <a:off x="9116444" y="1784012"/>
+        <a:ext cx="1394486" cy="1784012"/>
+      </dsp:txXfrm>
+    </dsp:sp>
+    <dsp:sp modelId="{C1CC7A32-6758-4471-AE91-345AA4746C85}">
+      <dsp:nvSpPr>
+        <dsp:cNvPr id="0" name=""/>
+        <dsp:cNvSpPr/>
+      </dsp:nvSpPr>
+      <dsp:spPr>
+        <a:xfrm>
+          <a:off x="9158278" y="267601"/>
+          <a:ext cx="1310816" cy="1485190"/>
+        </a:xfrm>
+        <a:prstGeom prst="ellipse">
+          <a:avLst/>
+        </a:prstGeom>
+        <a:blipFill>
+          <a:blip xmlns:r="http://schemas.openxmlformats.org/officeDocument/2006/relationships" r:embed="rId7"/>
+          <a:srcRect/>
+          <a:stretch>
+            <a:fillRect l="-29000" r="-29000"/>
+          </a:stretch>
+        </a:blipFill>
+        <a:ln w="12700" cap="flat" cmpd="sng" algn="ctr">
+          <a:solidFill>
+            <a:schemeClr val="lt1">
+              <a:hueOff val="0"/>
+              <a:satOff val="0"/>
+              <a:lumOff val="0"/>
+              <a:alphaOff val="0"/>
+            </a:schemeClr>
+          </a:solidFill>
+          <a:prstDash val="solid"/>
+          <a:miter lim="800000"/>
+        </a:ln>
+        <a:effectLst/>
+      </dsp:spPr>
+      <dsp:style>
+        <a:lnRef idx="2">
+          <a:scrgbClr r="0" g="0" b="0"/>
+        </a:lnRef>
+        <a:fillRef idx="1">
+          <a:scrgbClr r="0" g="0" b="0"/>
+        </a:fillRef>
+        <a:effectRef idx="0">
+          <a:scrgbClr r="0" g="0" b="0"/>
+        </a:effectRef>
+        <a:fontRef idx="minor"/>
+      </dsp:style>
+    </dsp:sp>
+    <dsp:sp modelId="{B2BABDCC-AE96-4358-939B-E6C2C1880590}">
+      <dsp:nvSpPr>
+        <dsp:cNvPr id="0" name=""/>
+        <dsp:cNvSpPr/>
+      </dsp:nvSpPr>
+      <dsp:spPr>
+        <a:xfrm>
+          <a:off x="10552765" y="0"/>
+          <a:ext cx="1394486" cy="4460032"/>
+        </a:xfrm>
+        <a:prstGeom prst="roundRect">
+          <a:avLst>
+            <a:gd name="adj" fmla="val 10000"/>
+          </a:avLst>
+        </a:prstGeom>
+        <a:solidFill>
+          <a:schemeClr val="accent1">
+            <a:hueOff val="0"/>
+            <a:satOff val="0"/>
+            <a:lumOff val="0"/>
+            <a:alphaOff val="0"/>
+          </a:schemeClr>
+        </a:solidFill>
+        <a:ln w="12700" cap="flat" cmpd="sng" algn="ctr">
+          <a:solidFill>
+            <a:schemeClr val="lt1">
+              <a:hueOff val="0"/>
+              <a:satOff val="0"/>
+              <a:lumOff val="0"/>
+              <a:alphaOff val="0"/>
+            </a:schemeClr>
+          </a:solidFill>
+          <a:prstDash val="solid"/>
+          <a:miter lim="800000"/>
+        </a:ln>
+        <a:effectLst/>
+      </dsp:spPr>
+      <dsp:style>
+        <a:lnRef idx="2">
+          <a:scrgbClr r="0" g="0" b="0"/>
+        </a:lnRef>
+        <a:fillRef idx="1">
+          <a:scrgbClr r="0" g="0" b="0"/>
+        </a:fillRef>
+        <a:effectRef idx="0">
+          <a:scrgbClr r="0" g="0" b="0"/>
+        </a:effectRef>
+        <a:fontRef idx="minor">
+          <a:schemeClr val="lt1"/>
+        </a:fontRef>
+      </dsp:style>
+      <dsp:txBody>
+        <a:bodyPr spcFirstLastPara="0" vert="horz" wrap="square" lIns="85344" tIns="85344" rIns="85344" bIns="85344" numCol="1" spcCol="1270" anchor="ctr" anchorCtr="0">
+          <a:noAutofit/>
+        </a:bodyPr>
+        <a:lstStyle/>
+        <a:p>
+          <a:pPr marL="0" lvl="0" indent="0" algn="ctr" defTabSz="533400">
+            <a:lnSpc>
+              <a:spcPct val="90000"/>
+            </a:lnSpc>
+            <a:spcBef>
+              <a:spcPct val="0"/>
+            </a:spcBef>
+            <a:spcAft>
+              <a:spcPct val="35000"/>
+            </a:spcAft>
+            <a:buNone/>
+          </a:pPr>
+          <a:r>
+            <a:rPr lang="en-IN" sz="1200" kern="1200" dirty="0">
+              <a:latin typeface="Arial" panose="020B0604020202020204" pitchFamily="34" charset="0"/>
+              <a:cs typeface="Arial" panose="020B0604020202020204" pitchFamily="34" charset="0"/>
+            </a:rPr>
+            <a:t>Recommendations</a:t>
+          </a:r>
+        </a:p>
+      </dsp:txBody>
+      <dsp:txXfrm>
+        <a:off x="10552765" y="1784012"/>
+        <a:ext cx="1394486" cy="1784012"/>
+      </dsp:txXfrm>
+    </dsp:sp>
+    <dsp:sp modelId="{F6FBB88D-73B9-4281-8920-27D4E68263B6}">
+      <dsp:nvSpPr>
+        <dsp:cNvPr id="0" name=""/>
+        <dsp:cNvSpPr/>
+      </dsp:nvSpPr>
+      <dsp:spPr>
+        <a:xfrm>
+          <a:off x="10594599" y="267601"/>
+          <a:ext cx="1310816" cy="1485190"/>
+        </a:xfrm>
+        <a:prstGeom prst="ellipse">
+          <a:avLst/>
+        </a:prstGeom>
+        <a:blipFill>
+          <a:blip xmlns:r="http://schemas.openxmlformats.org/officeDocument/2006/relationships" r:embed="rId8"/>
+          <a:srcRect/>
+          <a:stretch>
+            <a:fillRect l="-9000" r="-9000"/>
+          </a:stretch>
+        </a:blipFill>
+        <a:ln w="12700" cap="flat" cmpd="sng" algn="ctr">
+          <a:solidFill>
+            <a:schemeClr val="lt1">
+              <a:hueOff val="0"/>
+              <a:satOff val="0"/>
+              <a:lumOff val="0"/>
+              <a:alphaOff val="0"/>
+            </a:schemeClr>
+          </a:solidFill>
+          <a:prstDash val="solid"/>
+          <a:miter lim="800000"/>
+        </a:ln>
+        <a:effectLst/>
+      </dsp:spPr>
+      <dsp:style>
+        <a:lnRef idx="2">
+          <a:scrgbClr r="0" g="0" b="0"/>
+        </a:lnRef>
+        <a:fillRef idx="1">
+          <a:scrgbClr r="0" g="0" b="0"/>
+        </a:fillRef>
+        <a:effectRef idx="0">
+          <a:scrgbClr r="0" g="0" b="0"/>
+        </a:effectRef>
+        <a:fontRef idx="minor"/>
+      </dsp:style>
+    </dsp:sp>
+    <dsp:sp modelId="{5B400373-7A8C-425D-B8AC-3A754B07DC22}">
+      <dsp:nvSpPr>
+        <dsp:cNvPr id="0" name=""/>
+        <dsp:cNvSpPr/>
+      </dsp:nvSpPr>
+      <dsp:spPr>
+        <a:xfrm>
+          <a:off x="477976" y="3568025"/>
+          <a:ext cx="10993451" cy="669004"/>
+        </a:xfrm>
+        <a:prstGeom prst="leftRightArrow">
+          <a:avLst/>
+        </a:prstGeom>
+        <a:solidFill>
+          <a:schemeClr val="accent1">
+            <a:tint val="60000"/>
+            <a:hueOff val="0"/>
+            <a:satOff val="0"/>
+            <a:lumOff val="0"/>
+            <a:alphaOff val="0"/>
+          </a:schemeClr>
+        </a:solidFill>
+        <a:ln w="12700" cap="flat" cmpd="sng" algn="ctr">
+          <a:solidFill>
+            <a:schemeClr val="lt1">
+              <a:hueOff val="0"/>
+              <a:satOff val="0"/>
+              <a:lumOff val="0"/>
+              <a:alphaOff val="0"/>
+            </a:schemeClr>
+          </a:solidFill>
+          <a:prstDash val="solid"/>
+          <a:miter lim="800000"/>
+        </a:ln>
+        <a:effectLst/>
+      </dsp:spPr>
+      <dsp:style>
+        <a:lnRef idx="2">
+          <a:scrgbClr r="0" g="0" b="0"/>
+        </a:lnRef>
+        <a:fillRef idx="1">
+          <a:scrgbClr r="0" g="0" b="0"/>
+        </a:fillRef>
+        <a:effectRef idx="0">
+          <a:scrgbClr r="0" g="0" b="0"/>
+        </a:effectRef>
+        <a:fontRef idx="minor"/>
+      </dsp:style>
+    </dsp:sp>
+  </dsp:spTree>
+</dsp:drawing>
+</file>
+
+<file path=ppt/diagrams/layout1.xml><?xml version="1.0" encoding="utf-8"?>
+<dgm:layoutDef xmlns:dgm="http://schemas.openxmlformats.org/drawingml/2006/diagram" xmlns:a="http://schemas.openxmlformats.org/drawingml/2006/main" uniqueId="urn:microsoft.com/office/officeart/2005/8/layout/hList7">
+  <dgm:title val=""/>
+  <dgm:desc val=""/>
+  <dgm:catLst>
+    <dgm:cat type="list" pri="12000"/>
+    <dgm:cat type="process" pri="20000"/>
+    <dgm:cat type="relationship" pri="14000"/>
+    <dgm:cat type="convert" pri="8000"/>
+    <dgm:cat type="picture" pri="25000"/>
+    <dgm:cat type="pictureconvert" pri="25000"/>
+  </dgm:catLst>
+  <dgm:sampData useDef="1">
+    <dgm:dataModel>
+      <dgm:ptLst/>
+      <dgm:bg/>
+      <dgm:whole/>
+    </dgm:dataModel>
+  </dgm:sampData>
+  <dgm:styleData>
+    <dgm:dataModel>
+      <dgm:ptLst>
+        <dgm:pt modelId="0" type="doc"/>
+        <dgm:pt modelId="1"/>
+        <dgm:pt modelId="2"/>
+      </dgm:ptLst>
+      <dgm:cxnLst>
+        <dgm:cxn modelId="3" srcId="0" destId="1" srcOrd="0" destOrd="0"/>
+        <dgm:cxn modelId="4" srcId="0" destId="2" srcOrd="1" destOrd="0"/>
+      </dgm:cxnLst>
+      <dgm:bg/>
+      <dgm:whole/>
+    </dgm:dataModel>
+  </dgm:styleData>
+  <dgm:clrData>
+    <dgm:dataModel>
+      <dgm:ptLst>
+        <dgm:pt modelId="0" type="doc"/>
+        <dgm:pt modelId="1"/>
+        <dgm:pt modelId="2"/>
+        <dgm:pt modelId="3"/>
+        <dgm:pt modelId="4"/>
+      </dgm:ptLst>
+      <dgm:cxnLst>
+        <dgm:cxn modelId="5" srcId="0" destId="1" srcOrd="0" destOrd="0"/>
+        <dgm:cxn modelId="6" srcId="0" destId="2" srcOrd="1" destOrd="0"/>
+        <dgm:cxn modelId="7" srcId="0" destId="3" srcOrd="2" destOrd="0"/>
+        <dgm:cxn modelId="8" srcId="0" destId="4" srcOrd="3" destOrd="0"/>
+      </dgm:cxnLst>
+      <dgm:bg/>
+      <dgm:whole/>
+    </dgm:dataModel>
+  </dgm:clrData>
+  <dgm:layoutNode name="Name0">
+    <dgm:varLst>
+      <dgm:dir/>
+      <dgm:resizeHandles val="exact"/>
+    </dgm:varLst>
+    <dgm:alg type="composite"/>
+    <dgm:shape xmlns:r="http://schemas.openxmlformats.org/officeDocument/2006/relationships" r:blip="">
+      <dgm:adjLst/>
+    </dgm:shape>
+    <dgm:presOf/>
+    <dgm:constrLst>
+      <dgm:constr type="w" for="ch" forName="fgShape" refType="w" fact="0.92"/>
+      <dgm:constr type="h" for="ch" forName="fgShape" refType="h" fact="0.15"/>
+      <dgm:constr type="b" for="ch" forName="fgShape" refType="h" fact="0.95"/>
+      <dgm:constr type="ctrX" for="ch" forName="fgShape" refType="w" fact="0.5"/>
+      <dgm:constr type="w" for="ch" forName="linComp" refType="w"/>
+      <dgm:constr type="h" for="ch" forName="linComp" refType="h"/>
+      <dgm:constr type="ctrX" for="ch" forName="linComp" refType="w" fact="0.5"/>
+    </dgm:constrLst>
+    <dgm:ruleLst/>
+    <dgm:layoutNode name="fgShape" styleLbl="fgShp">
+      <dgm:alg type="sp"/>
+      <dgm:shape xmlns:r="http://schemas.openxmlformats.org/officeDocument/2006/relationships" type="leftRightArrow" r:blip="" zOrderOff="99999">
+        <dgm:adjLst/>
+      </dgm:shape>
+      <dgm:presOf/>
+      <dgm:constrLst/>
+      <dgm:ruleLst/>
+    </dgm:layoutNode>
+    <dgm:layoutNode name="linComp">
+      <dgm:choose name="Name1">
+        <dgm:if name="Name2" func="var" arg="dir" op="equ" val="norm">
+          <dgm:alg type="lin"/>
+        </dgm:if>
+        <dgm:else name="Name3">
+          <dgm:alg type="lin">
+            <dgm:param type="linDir" val="fromR"/>
+          </dgm:alg>
+        </dgm:else>
+      </dgm:choose>
+      <dgm:shape xmlns:r="http://schemas.openxmlformats.org/officeDocument/2006/relationships" r:blip="">
+        <dgm:adjLst/>
+      </dgm:shape>
+      <dgm:presOf/>
+      <dgm:constrLst>
+        <dgm:constr type="w" for="ch" forName="compNode" refType="w"/>
+        <dgm:constr type="h" for="ch" forName="compNode" refType="h"/>
+        <dgm:constr type="w" for="ch" ptType="sibTrans" refType="w" refFor="ch" refForName="compNode" fact="0.03"/>
+        <dgm:constr type="primFontSz" for="des" ptType="node" op="equ" val="65"/>
+      </dgm:constrLst>
+      <dgm:ruleLst/>
+      <dgm:forEach name="nodesForEach" axis="ch" ptType="node">
+        <dgm:layoutNode name="compNode">
+          <dgm:alg type="composite"/>
+          <dgm:shape xmlns:r="http://schemas.openxmlformats.org/officeDocument/2006/relationships" r:blip="">
+            <dgm:adjLst/>
+          </dgm:shape>
+          <dgm:presOf/>
+          <dgm:constrLst>
+            <dgm:constr type="w" for="ch" forName="bkgdShape" refType="w"/>
+            <dgm:constr type="h" for="ch" forName="bkgdShape" refType="h"/>
+            <dgm:constr type="w" for="ch" forName="nodeTx" refType="w"/>
+            <dgm:constr type="h" for="ch" forName="nodeTx" refType="h" fact="0.4"/>
+            <dgm:constr type="b" for="ch" forName="nodeTx" refType="h" fact="0.8"/>
+            <dgm:constr type="w" for="ch" forName="invisiNode" refType="w" fact="0.01"/>
+            <dgm:constr type="h" for="ch" forName="invisiNode" refType="h" fact="0.06"/>
+            <dgm:constr type="t" for="ch" forName="invisiNode"/>
+            <dgm:constr type="ctrX" for="ch" forName="invisiNode" refType="w" fact="0.5"/>
+            <dgm:constr type="h" for="ch" forName="imagNode" refType="h" fact="0.333"/>
+            <dgm:constr type="w" for="ch" forName="imagNode" refType="h" refFor="ch" refForName="imagNode"/>
+            <dgm:constr type="ctrX" for="ch" forName="imagNode" refType="w" fact="0.5"/>
+            <dgm:constr type="t" for="ch" forName="imagNode" refType="h" fact="0.06"/>
+            <dgm:constr type="w" for="ch" forName="imagNode" refType="w" op="lte" fact="0.94"/>
+          </dgm:constrLst>
+          <dgm:ruleLst/>
+          <dgm:layoutNode name="bkgdShape">
+            <dgm:alg type="sp"/>
+            <dgm:shape xmlns:r="http://schemas.openxmlformats.org/officeDocument/2006/relationships" type="roundRect" r:blip="">
+              <dgm:adjLst>
+                <dgm:adj idx="1" val="0.1"/>
+              </dgm:adjLst>
+            </dgm:shape>
+            <dgm:presOf axis="desOrSelf" ptType="node"/>
+            <dgm:constrLst/>
+            <dgm:ruleLst/>
+          </dgm:layoutNode>
+          <dgm:layoutNode name="nodeTx">
+            <dgm:varLst>
+              <dgm:bulletEnabled val="1"/>
+            </dgm:varLst>
+            <dgm:alg type="tx">
+              <dgm:param type="txAnchorVert" val="mid"/>
+              <dgm:param type="txAnchorHorzCh" val="ctr"/>
+              <dgm:param type="stBulletLvl" val="2"/>
+            </dgm:alg>
+            <dgm:shape xmlns:r="http://schemas.openxmlformats.org/officeDocument/2006/relationships" type="rect" r:blip="" hideGeom="1">
+              <dgm:adjLst/>
+            </dgm:shape>
+            <dgm:presOf axis="desOrSelf" ptType="node"/>
+            <dgm:constrLst/>
+            <dgm:ruleLst>
+              <dgm:rule type="primFontSz" val="5" fact="NaN" max="NaN"/>
+            </dgm:ruleLst>
+          </dgm:layoutNode>
+          <dgm:layoutNode name="invisiNode">
+            <dgm:alg type="sp"/>
+            <dgm:shape xmlns:r="http://schemas.openxmlformats.org/officeDocument/2006/relationships" type="roundRect" r:blip="" hideGeom="1">
+              <dgm:adjLst>
+                <dgm:adj idx="1" val="0.1"/>
+              </dgm:adjLst>
+            </dgm:shape>
+            <dgm:presOf/>
+            <dgm:constrLst/>
+            <dgm:ruleLst/>
+          </dgm:layoutNode>
+          <dgm:layoutNode name="imagNode" styleLbl="fgImgPlace1">
+            <dgm:alg type="sp"/>
+            <dgm:shape xmlns:r="http://schemas.openxmlformats.org/officeDocument/2006/relationships" type="ellipse" r:blip="" blipPhldr="1">
+              <dgm:adjLst/>
+            </dgm:shape>
+            <dgm:presOf/>
+            <dgm:constrLst/>
+            <dgm:ruleLst/>
+          </dgm:layoutNode>
+        </dgm:layoutNode>
+        <dgm:forEach name="sibTransForEach" axis="followSib" ptType="sibTrans" cnt="1">
+          <dgm:layoutNode name="sibTrans">
+            <dgm:alg type="sp"/>
+            <dgm:shape xmlns:r="http://schemas.openxmlformats.org/officeDocument/2006/relationships" type="rect" r:blip="" hideGeom="1">
+              <dgm:adjLst/>
+            </dgm:shape>
+            <dgm:presOf axis="self"/>
+            <dgm:constrLst/>
+            <dgm:ruleLst/>
+          </dgm:layoutNode>
+        </dgm:forEach>
+      </dgm:forEach>
+    </dgm:layoutNode>
+  </dgm:layoutNode>
+</dgm:layoutDef>
+</file>
+
+<file path=ppt/diagrams/quickStyle1.xml><?xml version="1.0" encoding="utf-8"?>
+<dgm:styleDef xmlns:dgm="http://schemas.openxmlformats.org/drawingml/2006/diagram" xmlns:a="http://schemas.openxmlformats.org/drawingml/2006/main" uniqueId="urn:microsoft.com/office/officeart/2005/8/quickstyle/simple1">
+  <dgm:title val=""/>
+  <dgm:desc val=""/>
+  <dgm:catLst>
+    <dgm:cat type="simple" pri="10100"/>
+  </dgm:catLst>
+  <dgm:scene3d>
+    <a:camera prst="orthographicFront"/>
+    <a:lightRig rig="threePt" dir="t"/>
+  </dgm:scene3d>
+  <dgm:styleLbl name="node0">
+    <dgm:scene3d>
+      <a:camera prst="orthographicFront"/>
+      <a:lightRig rig="threePt" dir="t"/>
+    </dgm:scene3d>
+    <dgm:sp3d/>
+    <dgm:txPr/>
+    <dgm:style>
+      <a:lnRef idx="2">
+        <a:scrgbClr r="0" g="0" b="0"/>
+      </a:lnRef>
+      <a:fillRef idx="1">
+        <a:scrgbClr r="0" g="0" b="0"/>
+      </a:fillRef>
+      <a:effectRef idx="0">
+        <a:scrgbClr r="0" g="0" b="0"/>
+      </a:effectRef>
+      <a:fontRef idx="minor">
+        <a:schemeClr val="lt1"/>
+      </a:fontRef>
+    </dgm:style>
+  </dgm:styleLbl>
+  <dgm:styleLbl name="lnNode1">
+    <dgm:scene3d>
+      <a:camera prst="orthographicFront"/>
+      <a:lightRig rig="threePt" dir="t"/>
+    </dgm:scene3d>
+    <dgm:sp3d/>
+    <dgm:txPr/>
+    <dgm:style>
+      <a:lnRef idx="2">
+        <a:scrgbClr r="0" g="0" b="0"/>
+      </a:lnRef>
+      <a:fillRef idx="1">
+        <a:scrgbClr r="0" g="0" b="0"/>
+      </a:fillRef>
+      <a:effectRef idx="0">
+        <a:scrgbClr r="0" g="0" b="0"/>
+      </a:effectRef>
+      <a:fontRef idx="minor">
+        <a:schemeClr val="lt1"/>
+      </a:fontRef>
+    </dgm:style>
+  </dgm:styleLbl>
+  <dgm:styleLbl name="vennNode1">
+    <dgm:scene3d>
+      <a:camera prst="orthographicFront"/>
+      <a:lightRig rig="threePt" dir="t"/>
+    </dgm:scene3d>
+    <dgm:sp3d/>
+    <dgm:txPr/>
+    <dgm:style>
+      <a:lnRef idx="2">
+        <a:scrgbClr r="0" g="0" b="0"/>
+      </a:lnRef>
+      <a:fillRef idx="1">
+        <a:scrgbClr r="0" g="0" b="0"/>
+      </a:fillRef>
+      <a:effectRef idx="0">
+        <a:scrgbClr r="0" g="0" b="0"/>
+      </a:effectRef>
+      <a:fontRef idx="minor">
+        <a:schemeClr val="tx1"/>
+      </a:fontRef>
+    </dgm:style>
+  </dgm:styleLbl>
+  <dgm:styleLbl name="alignNode1">
+    <dgm:scene3d>
+      <a:camera prst="orthographicFront"/>
+      <a:lightRig rig="threePt" dir="t"/>
+    </dgm:scene3d>
+    <dgm:sp3d/>
+    <dgm:txPr/>
+    <dgm:style>
+      <a:lnRef idx="2">
+        <a:scrgbClr r="0" g="0" b="0"/>
+      </a:lnRef>
+      <a:fillRef idx="1">
+        <a:scrgbClr r="0" g="0" b="0"/>
+      </a:fillRef>
+      <a:effectRef idx="0">
+        <a:scrgbClr r="0" g="0" b="0"/>
+      </a:effectRef>
+      <a:fontRef idx="minor">
+        <a:schemeClr val="lt1"/>
+      </a:fontRef>
+    </dgm:style>
+  </dgm:styleLbl>
+  <dgm:styleLbl name="node1">
+    <dgm:scene3d>
+      <a:camera prst="orthographicFront"/>
+      <a:lightRig rig="threePt" dir="t"/>
+    </dgm:scene3d>
+    <dgm:sp3d/>
+    <dgm:txPr/>
+    <dgm:style>
+      <a:lnRef idx="2">
+        <a:scrgbClr r="0" g="0" b="0"/>
+      </a:lnRef>
+      <a:fillRef idx="1">
+        <a:scrgbClr r="0" g="0" b="0"/>
+      </a:fillRef>
+      <a:effectRef idx="0">
+        <a:scrgbClr r="0" g="0" b="0"/>
+      </a:effectRef>
+      <a:fontRef idx="minor">
+        <a:schemeClr val="lt1"/>
+      </a:fontRef>
+    </dgm:style>
+  </dgm:styleLbl>
+  <dgm:styleLbl name="node2">
+    <dgm:scene3d>
+      <a:camera prst="orthographicFront"/>
+      <a:lightRig rig="threePt" dir="t"/>
+    </dgm:scene3d>
+    <dgm:sp3d/>
+    <dgm:txPr/>
+    <dgm:style>
+      <a:lnRef idx="2">
+        <a:scrgbClr r="0" g="0" b="0"/>
+      </a:lnRef>
+      <a:fillRef idx="1">
+        <a:scrgbClr r="0" g="0" b="0"/>
+      </a:fillRef>
+      <a:effectRef idx="0">
+        <a:scrgbClr r="0" g="0" b="0"/>
+      </a:effectRef>
+      <a:fontRef idx="minor">
+        <a:schemeClr val="lt1"/>
+      </a:fontRef>
+    </dgm:style>
+  </dgm:styleLbl>
+  <dgm:styleLbl name="node3">
+    <dgm:scene3d>
+      <a:camera prst="orthographicFront"/>
+      <a:lightRig rig="threePt" dir="t"/>
+    </dgm:scene3d>
+    <dgm:sp3d/>
+    <dgm:txPr/>
+    <dgm:style>
+      <a:lnRef idx="2">
+        <a:scrgbClr r="0" g="0" b="0"/>
+      </a:lnRef>
+      <a:fillRef idx="1">
+        <a:scrgbClr r="0" g="0" b="0"/>
+      </a:fillRef>
+      <a:effectRef idx="0">
+        <a:scrgbClr r="0" g="0" b="0"/>
+      </a:effectRef>
+      <a:fontRef idx="minor">
+        <a:schemeClr val="lt1"/>
+      </a:fontRef>
+    </dgm:style>
+  </dgm:styleLbl>
+  <dgm:styleLbl name="node4">
+    <dgm:scene3d>
+      <a:camera prst="orthographicFront"/>
+      <a:lightRig rig="threePt" dir="t"/>
+    </dgm:scene3d>
+    <dgm:sp3d/>
+    <dgm:txPr/>
+    <dgm:style>
+      <a:lnRef idx="2">
+        <a:scrgbClr r="0" g="0" b="0"/>
+      </a:lnRef>
+      <a:fillRef idx="1">
+        <a:scrgbClr r="0" g="0" b="0"/>
+      </a:fillRef>
+      <a:effectRef idx="0">
+        <a:scrgbClr r="0" g="0" b="0"/>
+      </a:effectRef>
+      <a:fontRef idx="minor">
+        <a:schemeClr val="lt1"/>
+      </a:fontRef>
+    </dgm:style>
+  </dgm:styleLbl>
+  <dgm:styleLbl name="fgImgPlace1">
+    <dgm:scene3d>
+      <a:camera prst="orthographicFront"/>
+      <a:lightRig rig="threePt" dir="t"/>
+    </dgm:scene3d>
+    <dgm:sp3d/>
+    <dgm:txPr/>
+    <dgm:style>
+      <a:lnRef idx="2">
+        <a:scrgbClr r="0" g="0" b="0"/>
+      </a:lnRef>
+      <a:fillRef idx="1">
+        <a:scrgbClr r="0" g="0" b="0"/>
+      </a:fillRef>
+      <a:effectRef idx="0">
+        <a:scrgbClr r="0" g="0" b="0"/>
+      </a:effectRef>
+      <a:fontRef idx="minor"/>
+    </dgm:style>
+  </dgm:styleLbl>
+  <dgm:styleLbl name="alignImgPlace1">
+    <dgm:scene3d>
+      <a:camera prst="orthographicFront"/>
+      <a:lightRig rig="threePt" dir="t"/>
+    </dgm:scene3d>
+    <dgm:sp3d/>
+    <dgm:txPr/>
+    <dgm:style>
+      <a:lnRef idx="2">
+        <a:scrgbClr r="0" g="0" b="0"/>
+      </a:lnRef>
+      <a:fillRef idx="1">
+        <a:scrgbClr r="0" g="0" b="0"/>
+      </a:fillRef>
+      <a:effectRef idx="0">
+        <a:scrgbClr r="0" g="0" b="0"/>
+      </a:effectRef>
+      <a:fontRef idx="minor"/>
+    </dgm:style>
+  </dgm:styleLbl>
+  <dgm:styleLbl name="bgImgPlace1">
+    <dgm:scene3d>
+      <a:camera prst="orthographicFront"/>
+      <a:lightRig rig="threePt" dir="t"/>
+    </dgm:scene3d>
+    <dgm:sp3d/>
+    <dgm:txPr/>
+    <dgm:style>
+      <a:lnRef idx="2">
+        <a:scrgbClr r="0" g="0" b="0"/>
+      </a:lnRef>
+      <a:fillRef idx="1">
+        <a:scrgbClr r="0" g="0" b="0"/>
+      </a:fillRef>
+      <a:effectRef idx="0">
+        <a:scrgbClr r="0" g="0" b="0"/>
+      </a:effectRef>
+      <a:fontRef idx="minor"/>
+    </dgm:style>
+  </dgm:styleLbl>
+  <dgm:styleLbl name="sibTrans2D1">
+    <dgm:scene3d>
+      <a:camera prst="orthographicFront"/>
+      <a:lightRig rig="threePt" dir="t"/>
+    </dgm:scene3d>
+    <dgm:sp3d/>
+    <dgm:txPr/>
+    <dgm:style>
+      <a:lnRef idx="0">
+        <a:scrgbClr r="0" g="0" b="0"/>
+      </a:lnRef>
+      <a:fillRef idx="1">
+        <a:scrgbClr r="0" g="0" b="0"/>
+      </a:fillRef>
+      <a:effectRef idx="0">
+        <a:scrgbClr r="0" g="0" b="0"/>
+      </a:effectRef>
+      <a:fontRef idx="minor">
+        <a:schemeClr val="lt1"/>
+      </a:fontRef>
+    </dgm:style>
+  </dgm:styleLbl>
+  <dgm:styleLbl name="fgSibTrans2D1">
+    <dgm:scene3d>
+      <a:camera prst="orthographicFront"/>
+      <a:lightRig rig="threePt" dir="t"/>
+    </dgm:scene3d>
+    <dgm:sp3d/>
+    <dgm:txPr/>
+    <dgm:style>
+      <a:lnRef idx="0">
+        <a:scrgbClr r="0" g="0" b="0"/>
+      </a:lnRef>
+      <a:fillRef idx="1">
+        <a:scrgbClr r="0" g="0" b="0"/>
+      </a:fillRef>
+      <a:effectRef idx="0">
+        <a:scrgbClr r="0" g="0" b="0"/>
+      </a:effectRef>
+      <a:fontRef idx="minor">
+        <a:schemeClr val="lt1"/>
+      </a:fontRef>
+    </dgm:style>
+  </dgm:styleLbl>
+  <dgm:styleLbl name="bgSibTrans2D1">
+    <dgm:scene3d>
+      <a:camera prst="orthographicFront"/>
+      <a:lightRig rig="threePt" dir="t"/>
+    </dgm:scene3d>
+    <dgm:sp3d/>
+    <dgm:txPr/>
+    <dgm:style>
+      <a:lnRef idx="0">
+        <a:scrgbClr r="0" g="0" b="0"/>
+      </a:lnRef>
+      <a:fillRef idx="1">
+        <a:scrgbClr r="0" g="0" b="0"/>
+      </a:fillRef>
+      <a:effectRef idx="0">
+        <a:scrgbClr r="0" g="0" b="0"/>
+      </a:effectRef>
+      <a:fontRef idx="minor">
+        <a:schemeClr val="lt1"/>
+      </a:fontRef>
+    </dgm:style>
+  </dgm:styleLbl>
+  <dgm:styleLbl name="sibTrans1D1">
+    <dgm:scene3d>
+      <a:camera prst="orthographicFront"/>
+      <a:lightRig rig="threePt" dir="t"/>
+    </dgm:scene3d>
+    <dgm:sp3d/>
+    <dgm:txPr/>
+    <dgm:style>
+      <a:lnRef idx="1">
+        <a:scrgbClr r="0" g="0" b="0"/>
+      </a:lnRef>
+      <a:fillRef idx="0">
+        <a:scrgbClr r="0" g="0" b="0"/>
+      </a:fillRef>
+      <a:effectRef idx="0">
+        <a:scrgbClr r="0" g="0" b="0"/>
+      </a:effectRef>
+      <a:fontRef idx="minor"/>
+    </dgm:style>
+  </dgm:styleLbl>
+  <dgm:styleLbl name="callout">
+    <dgm:scene3d>
+      <a:camera prst="orthographicFront"/>
+      <a:lightRig rig="threePt" dir="t"/>
+    </dgm:scene3d>
+    <dgm:sp3d/>
+    <dgm:txPr/>
+    <dgm:style>
+      <a:lnRef idx="2">
+        <a:scrgbClr r="0" g="0" b="0"/>
+      </a:lnRef>
+      <a:fillRef idx="1">
+        <a:scrgbClr r="0" g="0" b="0"/>
+      </a:fillRef>
+      <a:effectRef idx="0">
+        <a:scrgbClr r="0" g="0" b="0"/>
+      </a:effectRef>
+      <a:fontRef idx="minor"/>
+    </dgm:style>
+  </dgm:styleLbl>
+  <dgm:styleLbl name="asst0">
+    <dgm:scene3d>
+      <a:camera prst="orthographicFront"/>
+      <a:lightRig rig="threePt" dir="t"/>
+    </dgm:scene3d>
+    <dgm:sp3d/>
+    <dgm:txPr/>
+    <dgm:style>
+      <a:lnRef idx="2">
+        <a:scrgbClr r="0" g="0" b="0"/>
+      </a:lnRef>
+      <a:fillRef idx="1">
+        <a:scrgbClr r="0" g="0" b="0"/>
+      </a:fillRef>
+      <a:effectRef idx="0">
+        <a:scrgbClr r="0" g="0" b="0"/>
+      </a:effectRef>
+      <a:fontRef idx="minor">
+        <a:schemeClr val="lt1"/>
+      </a:fontRef>
+    </dgm:style>
+  </dgm:styleLbl>
+  <dgm:styleLbl name="asst1">
+    <dgm:scene3d>
+      <a:camera prst="orthographicFront"/>
+      <a:lightRig rig="threePt" dir="t"/>
+    </dgm:scene3d>
+    <dgm:sp3d/>
+    <dgm:txPr/>
+    <dgm:style>
+      <a:lnRef idx="2">
+        <a:scrgbClr r="0" g="0" b="0"/>
+      </a:lnRef>
+      <a:fillRef idx="1">
+        <a:scrgbClr r="0" g="0" b="0"/>
+      </a:fillRef>
+      <a:effectRef idx="0">
+        <a:scrgbClr r="0" g="0" b="0"/>
+      </a:effectRef>
+      <a:fontRef idx="minor">
+        <a:schemeClr val="lt1"/>
+      </a:fontRef>
+    </dgm:style>
+  </dgm:styleLbl>
+  <dgm:styleLbl name="asst2">
+    <dgm:scene3d>
+      <a:camera prst="orthographicFront"/>
+      <a:lightRig rig="threePt" dir="t"/>
+    </dgm:scene3d>
+    <dgm:sp3d/>
+    <dgm:txPr/>
+    <dgm:style>
+      <a:lnRef idx="2">
+        <a:scrgbClr r="0" g="0" b="0"/>
+      </a:lnRef>
+      <a:fillRef idx="1">
+        <a:scrgbClr r="0" g="0" b="0"/>
+      </a:fillRef>
+      <a:effectRef idx="0">
+        <a:scrgbClr r="0" g="0" b="0"/>
+      </a:effectRef>
+      <a:fontRef idx="minor">
+        <a:schemeClr val="lt1"/>
+      </a:fontRef>
+    </dgm:style>
+  </dgm:styleLbl>
+  <dgm:styleLbl name="asst3">
+    <dgm:scene3d>
+      <a:camera prst="orthographicFront"/>
+      <a:lightRig rig="threePt" dir="t"/>
+    </dgm:scene3d>
+    <dgm:sp3d/>
+    <dgm:txPr/>
+    <dgm:style>
+      <a:lnRef idx="2">
+        <a:scrgbClr r="0" g="0" b="0"/>
+      </a:lnRef>
+      <a:fillRef idx="1">
+        <a:scrgbClr r="0" g="0" b="0"/>
+      </a:fillRef>
+      <a:effectRef idx="0">
+        <a:scrgbClr r="0" g="0" b="0"/>
+      </a:effectRef>
+      <a:fontRef idx="minor">
+        <a:schemeClr val="lt1"/>
+      </a:fontRef>
+    </dgm:style>
+  </dgm:styleLbl>
+  <dgm:styleLbl name="asst4">
+    <dgm:scene3d>
+      <a:camera prst="orthographicFront"/>
+      <a:lightRig rig="threePt" dir="t"/>
+    </dgm:scene3d>
+    <dgm:sp3d/>
+    <dgm:txPr/>
+    <dgm:style>
+      <a:lnRef idx="2">
+        <a:scrgbClr r="0" g="0" b="0"/>
+      </a:lnRef>
+      <a:fillRef idx="1">
+        <a:scrgbClr r="0" g="0" b="0"/>
+      </a:fillRef>
+      <a:effectRef idx="0">
+        <a:scrgbClr r="0" g="0" b="0"/>
+      </a:effectRef>
+      <a:fontRef idx="minor">
+        <a:schemeClr val="lt1"/>
+      </a:fontRef>
+    </dgm:style>
+  </dgm:styleLbl>
+  <dgm:styleLbl name="parChTrans2D1">
+    <dgm:scene3d>
+      <a:camera prst="orthographicFront"/>
+      <a:lightRig rig="threePt" dir="t"/>
+    </dgm:scene3d>
+    <dgm:sp3d/>
+    <dgm:txPr/>
+    <dgm:style>
+      <a:lnRef idx="2">
+        <a:scrgbClr r="0" g="0" b="0"/>
+      </a:lnRef>
+      <a:fillRef idx="1">
+        <a:scrgbClr r="0" g="0" b="0"/>
+      </a:fillRef>
+      <a:effectRef idx="0">
+        <a:scrgbClr r="0" g="0" b="0"/>
+      </a:effectRef>
+      <a:fontRef idx="minor">
+        <a:schemeClr val="lt1"/>
+      </a:fontRef>
+    </dgm:style>
+  </dgm:styleLbl>
+  <dgm:styleLbl name="parChTrans2D2">
+    <dgm:scene3d>
+      <a:camera prst="orthographicFront"/>
+      <a:lightRig rig="threePt" dir="t"/>
+    </dgm:scene3d>
+    <dgm:sp3d/>
+    <dgm:txPr/>
+    <dgm:style>
+      <a:lnRef idx="2">
+        <a:scrgbClr r="0" g="0" b="0"/>
+      </a:lnRef>
+      <a:fillRef idx="1">
+        <a:scrgbClr r="0" g="0" b="0"/>
+      </a:fillRef>
+      <a:effectRef idx="0">
+        <a:scrgbClr r="0" g="0" b="0"/>
+      </a:effectRef>
+      <a:fontRef idx="minor">
+        <a:schemeClr val="lt1"/>
+      </a:fontRef>
+    </dgm:style>
+  </dgm:styleLbl>
+  <dgm:styleLbl name="parChTrans2D3">
+    <dgm:scene3d>
+      <a:camera prst="orthographicFront"/>
+      <a:lightRig rig="threePt" dir="t"/>
+    </dgm:scene3d>
+    <dgm:sp3d/>
+    <dgm:txPr/>
+    <dgm:style>
+      <a:lnRef idx="2">
+        <a:scrgbClr r="0" g="0" b="0"/>
+      </a:lnRef>
+      <a:fillRef idx="1">
+        <a:scrgbClr r="0" g="0" b="0"/>
+      </a:fillRef>
+      <a:effectRef idx="0">
+        <a:scrgbClr r="0" g="0" b="0"/>
+      </a:effectRef>
+      <a:fontRef idx="minor">
+        <a:schemeClr val="lt1"/>
+      </a:fontRef>
+    </dgm:style>
+  </dgm:styleLbl>
+  <dgm:styleLbl name="parChTrans2D4">
+    <dgm:scene3d>
+      <a:camera prst="orthographicFront"/>
+      <a:lightRig rig="threePt" dir="t"/>
+    </dgm:scene3d>
+    <dgm:sp3d/>
+    <dgm:txPr/>
+    <dgm:style>
+      <a:lnRef idx="2">
+        <a:scrgbClr r="0" g="0" b="0"/>
+      </a:lnRef>
+      <a:fillRef idx="1">
+        <a:scrgbClr r="0" g="0" b="0"/>
+      </a:fillRef>
+      <a:effectRef idx="0">
+        <a:scrgbClr r="0" g="0" b="0"/>
+      </a:effectRef>
+      <a:fontRef idx="minor">
+        <a:schemeClr val="lt1"/>
+      </a:fontRef>
+    </dgm:style>
+  </dgm:styleLbl>
+  <dgm:styleLbl name="parChTrans1D1">
+    <dgm:scene3d>
+      <a:camera prst="orthographicFront"/>
+      <a:lightRig rig="threePt" dir="t"/>
+    </dgm:scene3d>
+    <dgm:sp3d/>
+    <dgm:txPr/>
+    <dgm:style>
+      <a:lnRef idx="2">
+        <a:scrgbClr r="0" g="0" b="0"/>
+      </a:lnRef>
+      <a:fillRef idx="0">
+        <a:scrgbClr r="0" g="0" b="0"/>
+      </a:fillRef>
+      <a:effectRef idx="0">
+        <a:scrgbClr r="0" g="0" b="0"/>
+      </a:effectRef>
+      <a:fontRef idx="minor"/>
+    </dgm:style>
+  </dgm:styleLbl>
+  <dgm:styleLbl name="parChTrans1D2">
+    <dgm:scene3d>
+      <a:camera prst="orthographicFront"/>
+      <a:lightRig rig="threePt" dir="t"/>
+    </dgm:scene3d>
+    <dgm:sp3d/>
+    <dgm:txPr/>
+    <dgm:style>
+      <a:lnRef idx="2">
+        <a:scrgbClr r="0" g="0" b="0"/>
+      </a:lnRef>
+      <a:fillRef idx="0">
+        <a:scrgbClr r="0" g="0" b="0"/>
+      </a:fillRef>
+      <a:effectRef idx="0">
+        <a:scrgbClr r="0" g="0" b="0"/>
+      </a:effectRef>
+      <a:fontRef idx="minor"/>
+    </dgm:style>
+  </dgm:styleLbl>
+  <dgm:styleLbl name="parChTrans1D3">
+    <dgm:scene3d>
+      <a:camera prst="orthographicFront"/>
+      <a:lightRig rig="threePt" dir="t"/>
+    </dgm:scene3d>
+    <dgm:sp3d/>
+    <dgm:txPr/>
+    <dgm:style>
+      <a:lnRef idx="2">
+        <a:scrgbClr r="0" g="0" b="0"/>
+      </a:lnRef>
+      <a:fillRef idx="0">
+        <a:scrgbClr r="0" g="0" b="0"/>
+      </a:fillRef>
+      <a:effectRef idx="0">
+        <a:scrgbClr r="0" g="0" b="0"/>
+      </a:effectRef>
+      <a:fontRef idx="minor"/>
+    </dgm:style>
+  </dgm:styleLbl>
+  <dgm:styleLbl name="parChTrans1D4">
+    <dgm:scene3d>
+      <a:camera prst="orthographicFront"/>
+      <a:lightRig rig="threePt" dir="t"/>
+    </dgm:scene3d>
+    <dgm:sp3d/>
+    <dgm:txPr/>
+    <dgm:style>
+      <a:lnRef idx="2">
+        <a:scrgbClr r="0" g="0" b="0"/>
+      </a:lnRef>
+      <a:fillRef idx="0">
+        <a:scrgbClr r="0" g="0" b="0"/>
+      </a:fillRef>
+      <a:effectRef idx="0">
+        <a:scrgbClr r="0" g="0" b="0"/>
+      </a:effectRef>
+      <a:fontRef idx="minor"/>
+    </dgm:style>
+  </dgm:styleLbl>
+  <dgm:styleLbl name="fgAcc1">
+    <dgm:scene3d>
+      <a:camera prst="orthographicFront"/>
+      <a:lightRig rig="threePt" dir="t"/>
+    </dgm:scene3d>
+    <dgm:sp3d/>
+    <dgm:txPr/>
+    <dgm:style>
+      <a:lnRef idx="2">
+        <a:scrgbClr r="0" g="0" b="0"/>
+      </a:lnRef>
+      <a:fillRef idx="1">
+        <a:scrgbClr r="0" g="0" b="0"/>
+      </a:fillRef>
+      <a:effectRef idx="0">
+        <a:scrgbClr r="0" g="0" b="0"/>
+      </a:effectRef>
+      <a:fontRef idx="minor"/>
+    </dgm:style>
+  </dgm:styleLbl>
+  <dgm:styleLbl name="conFgAcc1">
+    <dgm:scene3d>
+      <a:camera prst="orthographicFront"/>
+      <a:lightRig rig="threePt" dir="t"/>
+    </dgm:scene3d>
+    <dgm:sp3d/>
+    <dgm:txPr/>
+    <dgm:style>
+      <a:lnRef idx="2">
+        <a:scrgbClr r="0" g="0" b="0"/>
+      </a:lnRef>
+      <a:fillRef idx="1">
+        <a:scrgbClr r="0" g="0" b="0"/>
+      </a:fillRef>
+      <a:effectRef idx="0">
+        <a:scrgbClr r="0" g="0" b="0"/>
+      </a:effectRef>
+      <a:fontRef idx="minor"/>
+    </dgm:style>
+  </dgm:styleLbl>
+  <dgm:styleLbl name="alignAcc1">
+    <dgm:scene3d>
+      <a:camera prst="orthographicFront"/>
+      <a:lightRig rig="threePt" dir="t"/>
+    </dgm:scene3d>
+    <dgm:sp3d/>
+    <dgm:txPr/>
+    <dgm:style>
+      <a:lnRef idx="2">
+        <a:scrgbClr r="0" g="0" b="0"/>
+      </a:lnRef>
+      <a:fillRef idx="1">
+        <a:scrgbClr r="0" g="0" b="0"/>
+      </a:fillRef>
+      <a:effectRef idx="0">
+        <a:scrgbClr r="0" g="0" b="0"/>
+      </a:effectRef>
+      <a:fontRef idx="minor"/>
+    </dgm:style>
+  </dgm:styleLbl>
+  <dgm:styleLbl name="trAlignAcc1">
+    <dgm:scene3d>
+      <a:camera prst="orthographicFront"/>
+      <a:lightRig rig="threePt" dir="t"/>
+    </dgm:scene3d>
+    <dgm:sp3d/>
+    <dgm:txPr/>
+    <dgm:style>
+      <a:lnRef idx="1">
+        <a:scrgbClr r="0" g="0" b="0"/>
+      </a:lnRef>
+      <a:fillRef idx="1">
+        <a:scrgbClr r="0" g="0" b="0"/>
+      </a:fillRef>
+      <a:effectRef idx="0">
+        <a:scrgbClr r="0" g="0" b="0"/>
+      </a:effectRef>
+      <a:fontRef idx="minor"/>
+    </dgm:style>
+  </dgm:styleLbl>
+  <dgm:styleLbl name="bgAcc1">
+    <dgm:scene3d>
+      <a:camera prst="orthographicFront"/>
+      <a:lightRig rig="threePt" dir="t"/>
+    </dgm:scene3d>
+    <dgm:sp3d/>
+    <dgm:txPr/>
+    <dgm:style>
+      <a:lnRef idx="2">
+        <a:scrgbClr r="0" g="0" b="0"/>
+      </a:lnRef>
+      <a:fillRef idx="1">
+        <a:scrgbClr r="0" g="0" b="0"/>
+      </a:fillRef>
+      <a:effectRef idx="0">
+        <a:scrgbClr r="0" g="0" b="0"/>
+      </a:effectRef>
+      <a:fontRef idx="minor"/>
+    </dgm:style>
+  </dgm:styleLbl>
+  <dgm:styleLbl name="solidFgAcc1">
+    <dgm:scene3d>
+      <a:camera prst="orthographicFront"/>
+      <a:lightRig rig="threePt" dir="t"/>
+    </dgm:scene3d>
+    <dgm:sp3d/>
+    <dgm:txPr/>
+    <dgm:style>
+      <a:lnRef idx="2">
+        <a:scrgbClr r="0" g="0" b="0"/>
+      </a:lnRef>
+      <a:fillRef idx="1">
+        <a:scrgbClr r="0" g="0" b="0"/>
+      </a:fillRef>
+      <a:effectRef idx="0">
+        <a:scrgbClr r="0" g="0" b="0"/>
+      </a:effectRef>
+      <a:fontRef idx="minor"/>
+    </dgm:style>
+  </dgm:styleLbl>
+  <dgm:styleLbl name="solidAlignAcc1">
+    <dgm:scene3d>
+      <a:camera prst="orthographicFront"/>
+      <a:lightRig rig="threePt" dir="t"/>
+    </dgm:scene3d>
+    <dgm:sp3d/>
+    <dgm:txPr/>
+    <dgm:style>
+      <a:lnRef idx="2">
+        <a:scrgbClr r="0" g="0" b="0"/>
+      </a:lnRef>
+      <a:fillRef idx="1">
+        <a:scrgbClr r="0" g="0" b="0"/>
+      </a:fillRef>
+      <a:effectRef idx="0">
+        <a:scrgbClr r="0" g="0" b="0"/>
+      </a:effectRef>
+      <a:fontRef idx="minor"/>
+    </dgm:style>
+  </dgm:styleLbl>
+  <dgm:styleLbl name="solidBgAcc1">
+    <dgm:scene3d>
+      <a:camera prst="orthographicFront"/>
+      <a:lightRig rig="threePt" dir="t"/>
+    </dgm:scene3d>
+    <dgm:sp3d/>
+    <dgm:txPr/>
+    <dgm:style>
+      <a:lnRef idx="2">
+        <a:scrgbClr r="0" g="0" b="0"/>
+      </a:lnRef>
+      <a:fillRef idx="1">
+        <a:scrgbClr r="0" g="0" b="0"/>
+      </a:fillRef>
+      <a:effectRef idx="0">
+        <a:scrgbClr r="0" g="0" b="0"/>
+      </a:effectRef>
+      <a:fontRef idx="minor"/>
+    </dgm:style>
+  </dgm:styleLbl>
+  <dgm:styleLbl name="fgAccFollowNode1">
+    <dgm:scene3d>
+      <a:camera prst="orthographicFront"/>
+      <a:lightRig rig="threePt" dir="t"/>
+    </dgm:scene3d>
+    <dgm:sp3d/>
+    <dgm:txPr/>
+    <dgm:style>
+      <a:lnRef idx="2">
+        <a:scrgbClr r="0" g="0" b="0"/>
+      </a:lnRef>
+      <a:fillRef idx="1">
+        <a:scrgbClr r="0" g="0" b="0"/>
+      </a:fillRef>
+      <a:effectRef idx="0">
+        <a:scrgbClr r="0" g="0" b="0"/>
+      </a:effectRef>
+      <a:fontRef idx="minor"/>
+    </dgm:style>
+  </dgm:styleLbl>
+  <dgm:styleLbl name="alignAccFollowNode1">
+    <dgm:scene3d>
+      <a:camera prst="orthographicFront"/>
+      <a:lightRig rig="threePt" dir="t"/>
+    </dgm:scene3d>
+    <dgm:sp3d/>
+    <dgm:txPr/>
+    <dgm:style>
+      <a:lnRef idx="2">
+        <a:scrgbClr r="0" g="0" b="0"/>
+      </a:lnRef>
+      <a:fillRef idx="1">
+        <a:scrgbClr r="0" g="0" b="0"/>
+      </a:fillRef>
+      <a:effectRef idx="0">
+        <a:scrgbClr r="0" g="0" b="0"/>
+      </a:effectRef>
+      <a:fontRef idx="minor"/>
+    </dgm:style>
+  </dgm:styleLbl>
+  <dgm:styleLbl name="bgAccFollowNode1">
+    <dgm:scene3d>
+      <a:camera prst="orthographicFront"/>
+      <a:lightRig rig="threePt" dir="t"/>
+    </dgm:scene3d>
+    <dgm:sp3d/>
+    <dgm:txPr/>
+    <dgm:style>
+      <a:lnRef idx="2">
+        <a:scrgbClr r="0" g="0" b="0"/>
+      </a:lnRef>
+      <a:fillRef idx="1">
+        <a:scrgbClr r="0" g="0" b="0"/>
+      </a:fillRef>
+      <a:effectRef idx="0">
+        <a:scrgbClr r="0" g="0" b="0"/>
+      </a:effectRef>
+      <a:fontRef idx="minor"/>
+    </dgm:style>
+  </dgm:styleLbl>
+  <dgm:styleLbl name="fgAcc0">
+    <dgm:scene3d>
+      <a:camera prst="orthographicFront"/>
+      <a:lightRig rig="threePt" dir="t"/>
+    </dgm:scene3d>
+    <dgm:sp3d/>
+    <dgm:txPr/>
+    <dgm:style>
+      <a:lnRef idx="2">
+        <a:scrgbClr r="0" g="0" b="0"/>
+      </a:lnRef>
+      <a:fillRef idx="1">
+        <a:scrgbClr r="0" g="0" b="0"/>
+      </a:fillRef>
+      <a:effectRef idx="0">
+        <a:scrgbClr r="0" g="0" b="0"/>
+      </a:effectRef>
+      <a:fontRef idx="minor"/>
+    </dgm:style>
+  </dgm:styleLbl>
+  <dgm:styleLbl name="fgAcc2">
+    <dgm:scene3d>
+      <a:camera prst="orthographicFront"/>
+      <a:lightRig rig="threePt" dir="t"/>
+    </dgm:scene3d>
+    <dgm:sp3d/>
+    <dgm:txPr/>
+    <dgm:style>
+      <a:lnRef idx="2">
+        <a:scrgbClr r="0" g="0" b="0"/>
+      </a:lnRef>
+      <a:fillRef idx="1">
+        <a:scrgbClr r="0" g="0" b="0"/>
+      </a:fillRef>
+      <a:effectRef idx="0">
+        <a:scrgbClr r="0" g="0" b="0"/>
+      </a:effectRef>
+      <a:fontRef idx="minor"/>
+    </dgm:style>
+  </dgm:styleLbl>
+  <dgm:styleLbl name="fgAcc3">
+    <dgm:scene3d>
+      <a:camera prst="orthographicFront"/>
+      <a:lightRig rig="threePt" dir="t"/>
+    </dgm:scene3d>
+    <dgm:sp3d/>
+    <dgm:txPr/>
+    <dgm:style>
+      <a:lnRef idx="2">
+        <a:scrgbClr r="0" g="0" b="0"/>
+      </a:lnRef>
+      <a:fillRef idx="1">
+        <a:scrgbClr r="0" g="0" b="0"/>
+      </a:fillRef>
+      <a:effectRef idx="0">
+        <a:scrgbClr r="0" g="0" b="0"/>
+      </a:effectRef>
+      <a:fontRef idx="minor"/>
+    </dgm:style>
+  </dgm:styleLbl>
+  <dgm:styleLbl name="fgAcc4">
+    <dgm:scene3d>
+      <a:camera prst="orthographicFront"/>
+      <a:lightRig rig="threePt" dir="t"/>
+    </dgm:scene3d>
+    <dgm:sp3d/>
+    <dgm:txPr/>
+    <dgm:style>
+      <a:lnRef idx="2">
+        <a:scrgbClr r="0" g="0" b="0"/>
+      </a:lnRef>
+      <a:fillRef idx="1">
+        <a:scrgbClr r="0" g="0" b="0"/>
+      </a:fillRef>
+      <a:effectRef idx="0">
+        <a:scrgbClr r="0" g="0" b="0"/>
+      </a:effectRef>
+      <a:fontRef idx="minor"/>
+    </dgm:style>
+  </dgm:styleLbl>
+  <dgm:styleLbl name="bgShp">
+    <dgm:scene3d>
+      <a:camera prst="orthographicFront"/>
+      <a:lightRig rig="threePt" dir="t"/>
+    </dgm:scene3d>
+    <dgm:sp3d/>
+    <dgm:txPr/>
+    <dgm:style>
+      <a:lnRef idx="0">
+        <a:scrgbClr r="0" g="0" b="0"/>
+      </a:lnRef>
+      <a:fillRef idx="1">
+        <a:scrgbClr r="0" g="0" b="0"/>
+      </a:fillRef>
+      <a:effectRef idx="0">
+        <a:scrgbClr r="0" g="0" b="0"/>
+      </a:effectRef>
+      <a:fontRef idx="minor"/>
+    </dgm:style>
+  </dgm:styleLbl>
+  <dgm:styleLbl name="dkBgShp">
+    <dgm:scene3d>
+      <a:camera prst="orthographicFront"/>
+      <a:lightRig rig="threePt" dir="t"/>
+    </dgm:scene3d>
+    <dgm:sp3d/>
+    <dgm:txPr/>
+    <dgm:style>
+      <a:lnRef idx="0">
+        <a:scrgbClr r="0" g="0" b="0"/>
+      </a:lnRef>
+      <a:fillRef idx="1">
+        <a:scrgbClr r="0" g="0" b="0"/>
+      </a:fillRef>
+      <a:effectRef idx="0">
+        <a:scrgbClr r="0" g="0" b="0"/>
+      </a:effectRef>
+      <a:fontRef idx="minor"/>
+    </dgm:style>
+  </dgm:styleLbl>
+  <dgm:styleLbl name="trBgShp">
+    <dgm:scene3d>
+      <a:camera prst="orthographicFront"/>
+      <a:lightRig rig="threePt" dir="t"/>
+    </dgm:scene3d>
+    <dgm:sp3d/>
+    <dgm:txPr/>
+    <dgm:style>
+      <a:lnRef idx="0">
+        <a:scrgbClr r="0" g="0" b="0"/>
+      </a:lnRef>
+      <a:fillRef idx="1">
+        <a:scrgbClr r="0" g="0" b="0"/>
+      </a:fillRef>
+      <a:effectRef idx="0">
+        <a:scrgbClr r="0" g="0" b="0"/>
+      </a:effectRef>
+      <a:fontRef idx="minor"/>
+    </dgm:style>
+  </dgm:styleLbl>
+  <dgm:styleLbl name="fgShp">
+    <dgm:scene3d>
+      <a:camera prst="orthographicFront"/>
+      <a:lightRig rig="threePt" dir="t"/>
+    </dgm:scene3d>
+    <dgm:sp3d/>
+    <dgm:txPr/>
+    <dgm:style>
+      <a:lnRef idx="2">
+        <a:scrgbClr r="0" g="0" b="0"/>
+      </a:lnRef>
+      <a:fillRef idx="1">
+        <a:scrgbClr r="0" g="0" b="0"/>
+      </a:fillRef>
+      <a:effectRef idx="0">
+        <a:scrgbClr r="0" g="0" b="0"/>
+      </a:effectRef>
+      <a:fontRef idx="minor"/>
+    </dgm:style>
+  </dgm:styleLbl>
+  <dgm:styleLbl name="revTx">
+    <dgm:scene3d>
+      <a:camera prst="orthographicFront"/>
+      <a:lightRig rig="threePt" dir="t"/>
+    </dgm:scene3d>
+    <dgm:sp3d/>
+    <dgm:txPr/>
+    <dgm:style>
+      <a:lnRef idx="0">
+        <a:scrgbClr r="0" g="0" b="0"/>
+      </a:lnRef>
+      <a:fillRef idx="0">
+        <a:scrgbClr r="0" g="0" b="0"/>
+      </a:fillRef>
+      <a:effectRef idx="0">
+        <a:scrgbClr r="0" g="0" b="0"/>
+      </a:effectRef>
+      <a:fontRef idx="minor"/>
+    </dgm:style>
+  </dgm:styleLbl>
+</dgm:styleDef>
 </file>
 
 <file path=ppt/slideLayouts/slideLayout1.xml><?xml version="1.0" encoding="utf-8"?>
@@ -3412,7 +7274,7 @@
                 <a:latin typeface="Arial" panose="020B0604020202020204" pitchFamily="34" charset="0"/>
                 <a:cs typeface="Arial" panose="020B0604020202020204" pitchFamily="34" charset="0"/>
               </a:rPr>
-              <a:t>Business Context : </a:t>
+              <a:t>Business Context </a:t>
             </a:r>
           </a:p>
           <a:p>
@@ -4892,6 +8754,108 @@
           <p:cNvPr id="2" name="Title 1">
             <a:extLst>
               <a:ext uri="{FF2B5EF4-FFF2-40B4-BE49-F238E27FC236}">
+                <a16:creationId xmlns:a16="http://schemas.microsoft.com/office/drawing/2014/main" id="{3AB0D7F0-B353-954A-374F-17072674AE5F}"/>
+              </a:ext>
+            </a:extLst>
+          </p:cNvPr>
+          <p:cNvSpPr>
+            <a:spLocks noGrp="1"/>
+          </p:cNvSpPr>
+          <p:nvPr>
+            <p:ph type="title"/>
+          </p:nvPr>
+        </p:nvSpPr>
+        <p:spPr>
+          <a:xfrm>
+            <a:off x="427653" y="215835"/>
+            <a:ext cx="10515600" cy="726557"/>
+          </a:xfrm>
+        </p:spPr>
+        <p:txBody>
+          <a:bodyPr>
+            <a:normAutofit/>
+          </a:bodyPr>
+          <a:lstStyle/>
+          <a:p>
+            <a:r>
+              <a:rPr lang="en-IN" sz="2400" u="sng" dirty="0">
+                <a:solidFill>
+                  <a:srgbClr val="339933"/>
+                </a:solidFill>
+                <a:latin typeface="Arial" panose="020B0604020202020204" pitchFamily="34" charset="0"/>
+                <a:cs typeface="Arial" panose="020B0604020202020204" pitchFamily="34" charset="0"/>
+              </a:rPr>
+              <a:t>Model Workflow</a:t>
+            </a:r>
+          </a:p>
+        </p:txBody>
+      </p:sp>
+      <p:graphicFrame>
+        <p:nvGraphicFramePr>
+          <p:cNvPr id="5" name="Content Placeholder 4">
+            <a:extLst>
+              <a:ext uri="{FF2B5EF4-FFF2-40B4-BE49-F238E27FC236}">
+                <a16:creationId xmlns:a16="http://schemas.microsoft.com/office/drawing/2014/main" id="{CA203C06-2056-651C-9CB3-FFB8E930A89A}"/>
+              </a:ext>
+            </a:extLst>
+          </p:cNvPr>
+          <p:cNvGraphicFramePr>
+            <a:graphicFrameLocks noGrp="1"/>
+          </p:cNvGraphicFramePr>
+          <p:nvPr>
+            <p:ph idx="1"/>
+            <p:extLst>
+              <p:ext uri="{D42A27DB-BD31-4B8C-83A1-F6EECF244321}">
+                <p14:modId xmlns:p14="http://schemas.microsoft.com/office/powerpoint/2010/main" val="2145883530"/>
+              </p:ext>
+            </p:extLst>
+          </p:nvPr>
+        </p:nvGraphicFramePr>
+        <p:xfrm>
+          <a:off x="121298" y="1408922"/>
+          <a:ext cx="11949404" cy="4460032"/>
+        </p:xfrm>
+        <a:graphic>
+          <a:graphicData uri="http://schemas.openxmlformats.org/drawingml/2006/diagram">
+            <dgm:relIds xmlns:dgm="http://schemas.openxmlformats.org/drawingml/2006/diagram" xmlns:r="http://schemas.openxmlformats.org/officeDocument/2006/relationships" r:dm="rId2" r:lo="rId3" r:qs="rId4" r:cs="rId5"/>
+          </a:graphicData>
+        </a:graphic>
+      </p:graphicFrame>
+    </p:spTree>
+    <p:extLst>
+      <p:ext uri="{BB962C8B-B14F-4D97-AF65-F5344CB8AC3E}">
+        <p14:creationId xmlns:p14="http://schemas.microsoft.com/office/powerpoint/2010/main" val="852606447"/>
+      </p:ext>
+    </p:extLst>
+  </p:cSld>
+  <p:clrMapOvr>
+    <a:masterClrMapping/>
+  </p:clrMapOvr>
+</p:sld>
+</file>
+
+<file path=ppt/slides/slide3.xml><?xml version="1.0" encoding="utf-8"?>
+<p:sld xmlns:a="http://schemas.openxmlformats.org/drawingml/2006/main" xmlns:r="http://schemas.openxmlformats.org/officeDocument/2006/relationships" xmlns:p="http://schemas.openxmlformats.org/presentationml/2006/main">
+  <p:cSld>
+    <p:spTree>
+      <p:nvGrpSpPr>
+        <p:cNvPr id="1" name=""/>
+        <p:cNvGrpSpPr/>
+        <p:nvPr/>
+      </p:nvGrpSpPr>
+      <p:grpSpPr>
+        <a:xfrm>
+          <a:off x="0" y="0"/>
+          <a:ext cx="0" cy="0"/>
+          <a:chOff x="0" y="0"/>
+          <a:chExt cx="0" cy="0"/>
+        </a:xfrm>
+      </p:grpSpPr>
+      <p:sp>
+        <p:nvSpPr>
+          <p:cNvPr id="2" name="Title 1">
+            <a:extLst>
+              <a:ext uri="{FF2B5EF4-FFF2-40B4-BE49-F238E27FC236}">
                 <a16:creationId xmlns:a16="http://schemas.microsoft.com/office/drawing/2014/main" id="{8ABC2857-719B-5977-C56D-00B145822833}"/>
               </a:ext>
             </a:extLst>
@@ -6005,7 +9969,7 @@
 </p:sld>
 </file>
 
-<file path=ppt/slides/slide3.xml><?xml version="1.0" encoding="utf-8"?>
+<file path=ppt/slides/slide4.xml><?xml version="1.0" encoding="utf-8"?>
 <p:sld xmlns:a="http://schemas.openxmlformats.org/drawingml/2006/main" xmlns:r="http://schemas.openxmlformats.org/officeDocument/2006/relationships" xmlns:p="http://schemas.openxmlformats.org/presentationml/2006/main">
   <p:cSld>
     <p:spTree>
@@ -6651,7 +10615,7 @@
 </p:sld>
 </file>
 
-<file path=ppt/slides/slide4.xml><?xml version="1.0" encoding="utf-8"?>
+<file path=ppt/slides/slide5.xml><?xml version="1.0" encoding="utf-8"?>
 <p:sld xmlns:a="http://schemas.openxmlformats.org/drawingml/2006/main" xmlns:r="http://schemas.openxmlformats.org/officeDocument/2006/relationships" xmlns:p="http://schemas.openxmlformats.org/presentationml/2006/main">
   <p:cSld>
     <p:spTree>
@@ -6821,7 +10785,7 @@
 </p:sld>
 </file>
 
-<file path=ppt/slides/slide5.xml><?xml version="1.0" encoding="utf-8"?>
+<file path=ppt/slides/slide6.xml><?xml version="1.0" encoding="utf-8"?>
 <p:sld xmlns:a="http://schemas.openxmlformats.org/drawingml/2006/main" xmlns:r="http://schemas.openxmlformats.org/officeDocument/2006/relationships" xmlns:p="http://schemas.openxmlformats.org/presentationml/2006/main">
   <p:cSld>
     <p:spTree>
@@ -7668,7 +11632,7 @@
 </p:sld>
 </file>
 
-<file path=ppt/slides/slide6.xml><?xml version="1.0" encoding="utf-8"?>
+<file path=ppt/slides/slide7.xml><?xml version="1.0" encoding="utf-8"?>
 <p:sld xmlns:a="http://schemas.openxmlformats.org/drawingml/2006/main" xmlns:r="http://schemas.openxmlformats.org/officeDocument/2006/relationships" xmlns:p="http://schemas.openxmlformats.org/presentationml/2006/main">
   <p:cSld>
     <p:spTree>
@@ -8736,7 +12700,7 @@
 </p:sld>
 </file>
 
-<file path=ppt/slides/slide7.xml><?xml version="1.0" encoding="utf-8"?>
+<file path=ppt/slides/slide8.xml><?xml version="1.0" encoding="utf-8"?>
 <p:sld xmlns:a="http://schemas.openxmlformats.org/drawingml/2006/main" xmlns:r="http://schemas.openxmlformats.org/officeDocument/2006/relationships" xmlns:p="http://schemas.openxmlformats.org/presentationml/2006/main">
   <p:cSld>
     <p:spTree>
@@ -8816,7 +12780,7 @@
 </p:sld>
 </file>
 
-<file path=ppt/slides/slide8.xml><?xml version="1.0" encoding="utf-8"?>
+<file path=ppt/slides/slide9.xml><?xml version="1.0" encoding="utf-8"?>
 <p:sld xmlns:a="http://schemas.openxmlformats.org/drawingml/2006/main" xmlns:r="http://schemas.openxmlformats.org/officeDocument/2006/relationships" xmlns:p="http://schemas.openxmlformats.org/presentationml/2006/main">
   <p:cSld>
     <p:spTree>
@@ -9227,21 +13191,21 @@
 </file>
 
 <file path=customXml/item1.xml><?xml version="1.0" encoding="utf-8"?>
+<?mso-contentType ?>
+<FormTemplates xmlns="http://schemas.microsoft.com/sharepoint/v3/contenttype/forms">
+  <Display>DocumentLibraryForm</Display>
+  <Edit>DocumentLibraryForm</Edit>
+  <New>DocumentLibraryForm</New>
+</FormTemplates>
+</file>
+
+<file path=customXml/item2.xml><?xml version="1.0" encoding="utf-8"?>
 <p:properties xmlns:p="http://schemas.microsoft.com/office/2006/metadata/properties" xmlns:xsi="http://www.w3.org/2001/XMLSchema-instance" xmlns:pc="http://schemas.microsoft.com/office/infopath/2007/PartnerControls">
   <documentManagement>
     <Document_x0020_Purpose xmlns="f577acbf-5b0b-4b4f-9948-268e97f8d3a4">Informational</Document_x0020_Purpose>
     <Initiatives xmlns="f577acbf-5b0b-4b4f-9948-268e97f8d3a4"/>
   </documentManagement>
 </p:properties>
-</file>
-
-<file path=customXml/item2.xml><?xml version="1.0" encoding="utf-8"?>
-<?mso-contentType ?>
-<FormTemplates xmlns="http://schemas.microsoft.com/sharepoint/v3/contenttype/forms">
-  <Display>DocumentLibraryForm</Display>
-  <Edit>DocumentLibraryForm</Edit>
-  <New>DocumentLibraryForm</New>
-</FormTemplates>
 </file>
 
 <file path=customXml/item3.xml><?xml version="1.0" encoding="utf-8"?>
@@ -9501,6 +13465,14 @@
 </file>
 
 <file path=customXml/itemProps1.xml><?xml version="1.0" encoding="utf-8"?>
+<ds:datastoreItem xmlns:ds="http://schemas.openxmlformats.org/officeDocument/2006/customXml" ds:itemID="{E21AFCC0-734A-4A90-A597-A1CB34860DCD}">
+  <ds:schemaRefs>
+    <ds:schemaRef ds:uri="http://schemas.microsoft.com/sharepoint/v3/contenttype/forms"/>
+  </ds:schemaRefs>
+</ds:datastoreItem>
+</file>
+
+<file path=customXml/itemProps2.xml><?xml version="1.0" encoding="utf-8"?>
 <ds:datastoreItem xmlns:ds="http://schemas.openxmlformats.org/officeDocument/2006/customXml" ds:itemID="{617AB1FA-2F28-4684-9230-02ACEB6C0B0A}">
   <ds:schemaRefs>
     <ds:schemaRef ds:uri="http://purl.org/dc/elements/1.1/"/>
@@ -9513,14 +13485,6 @@
     <ds:schemaRef ds:uri="http://purl.org/dc/dcmitype/"/>
     <ds:schemaRef ds:uri="http://schemas.microsoft.com/office/infopath/2007/PartnerControls"/>
     <ds:schemaRef ds:uri="http://www.w3.org/XML/1998/namespace"/>
-  </ds:schemaRefs>
-</ds:datastoreItem>
-</file>
-
-<file path=customXml/itemProps2.xml><?xml version="1.0" encoding="utf-8"?>
-<ds:datastoreItem xmlns:ds="http://schemas.openxmlformats.org/officeDocument/2006/customXml" ds:itemID="{E21AFCC0-734A-4A90-A597-A1CB34860DCD}">
-  <ds:schemaRefs>
-    <ds:schemaRef ds:uri="http://schemas.microsoft.com/sharepoint/v3/contenttype/forms"/>
   </ds:schemaRefs>
 </ds:datastoreItem>
 </file>
